--- a/slides/nxdg_2026_Deperias.pptx
+++ b/slides/nxdg_2026_Deperias.pptx
@@ -181,7 +181,7 @@
             </a:lvl1pPr>
           </a:lstStyle>
           <a:p>
-            <a:endParaRPr lang="en-BE"/>
+            <a:endParaRPr lang="en-BE" dirty="0"/>
           </a:p>
         </p:txBody>
       </p:sp>
@@ -216,7 +216,7 @@
               <a:rPr lang="en-BE" smtClean="0"/>
               <a:t>08/09/2026</a:t>
             </a:fld>
-            <a:endParaRPr lang="en-BE"/>
+            <a:endParaRPr lang="en-BE" dirty="0"/>
           </a:p>
         </p:txBody>
       </p:sp>
@@ -249,7 +249,7 @@
           <a:bodyPr vert="horz" lIns="91440" tIns="45720" rIns="91440" bIns="45720" rtlCol="0" anchor="ctr"/>
           <a:lstStyle/>
           <a:p>
-            <a:endParaRPr lang="en-BE"/>
+            <a:endParaRPr lang="en-BE" dirty="0"/>
           </a:p>
         </p:txBody>
       </p:sp>
@@ -340,7 +340,7 @@
             </a:lvl1pPr>
           </a:lstStyle>
           <a:p>
-            <a:endParaRPr lang="en-BE"/>
+            <a:endParaRPr lang="en-BE" dirty="0"/>
           </a:p>
         </p:txBody>
       </p:sp>
@@ -375,7 +375,7 @@
               <a:rPr lang="en-BE" smtClean="0"/>
               <a:t>‹#›</a:t>
             </a:fld>
-            <a:endParaRPr lang="en-BE"/>
+            <a:endParaRPr lang="en-BE" dirty="0"/>
           </a:p>
         </p:txBody>
       </p:sp>
@@ -630,10 +630,9 @@
           <a:lstStyle/>
           <a:p>
             <a:r>
-              <a:rPr lang="en-BE"/>
+              <a:rPr lang="en-BE" dirty="0"/>
               <a:t>15/09/2026</a:t>
             </a:r>
-            <a:endParaRPr lang="en-BE" dirty="0"/>
           </a:p>
         </p:txBody>
       </p:sp>
@@ -659,7 +658,7 @@
           <a:lstStyle/>
           <a:p>
             <a:r>
-              <a:rPr lang="en-GB"/>
+              <a:rPr lang="en-GB" dirty="0"/>
               <a:t>NXDG 2026 -Ghent, Belgium</a:t>
             </a:r>
             <a:endParaRPr lang="en-BE" dirty="0"/>
@@ -834,10 +833,9 @@
           <a:lstStyle/>
           <a:p>
             <a:r>
-              <a:rPr lang="en-BE"/>
+              <a:rPr lang="en-BE" dirty="0"/>
               <a:t>15/09/2026</a:t>
             </a:r>
-            <a:endParaRPr lang="en-BE" dirty="0"/>
           </a:p>
         </p:txBody>
       </p:sp>
@@ -863,7 +861,7 @@
           <a:lstStyle/>
           <a:p>
             <a:r>
-              <a:rPr lang="en-GB"/>
+              <a:rPr lang="en-GB" dirty="0"/>
               <a:t>NXDG 2026 -Ghent, Belgium</a:t>
             </a:r>
             <a:endParaRPr lang="en-BE" dirty="0"/>
@@ -1048,10 +1046,9 @@
           <a:lstStyle/>
           <a:p>
             <a:r>
-              <a:rPr lang="en-BE"/>
+              <a:rPr lang="en-BE" dirty="0"/>
               <a:t>15/09/2026</a:t>
             </a:r>
-            <a:endParaRPr lang="en-BE" dirty="0"/>
           </a:p>
         </p:txBody>
       </p:sp>
@@ -1077,7 +1074,7 @@
           <a:lstStyle/>
           <a:p>
             <a:r>
-              <a:rPr lang="en-GB"/>
+              <a:rPr lang="en-GB" dirty="0"/>
               <a:t>NXDG 2026 -Ghent, Belgium</a:t>
             </a:r>
             <a:endParaRPr lang="en-BE" dirty="0"/>
@@ -1252,10 +1249,9 @@
           <a:lstStyle/>
           <a:p>
             <a:r>
-              <a:rPr lang="en-BE"/>
+              <a:rPr lang="en-BE" dirty="0"/>
               <a:t>15/09/2026</a:t>
             </a:r>
-            <a:endParaRPr lang="en-BE" dirty="0"/>
           </a:p>
         </p:txBody>
       </p:sp>
@@ -1281,7 +1277,7 @@
           <a:lstStyle/>
           <a:p>
             <a:r>
-              <a:rPr lang="en-GB"/>
+              <a:rPr lang="en-GB" dirty="0"/>
               <a:t>NXDG 2026 -Ghent, Belgium</a:t>
             </a:r>
             <a:endParaRPr lang="en-BE" dirty="0"/>
@@ -1532,10 +1528,9 @@
           <a:lstStyle/>
           <a:p>
             <a:r>
-              <a:rPr lang="en-BE"/>
+              <a:rPr lang="en-BE" dirty="0"/>
               <a:t>15/09/2026</a:t>
             </a:r>
-            <a:endParaRPr lang="en-BE" dirty="0"/>
           </a:p>
         </p:txBody>
       </p:sp>
@@ -1561,7 +1556,7 @@
           <a:lstStyle/>
           <a:p>
             <a:r>
-              <a:rPr lang="en-GB"/>
+              <a:rPr lang="en-GB" dirty="0"/>
               <a:t>NXDG 2026 -Ghent, Belgium</a:t>
             </a:r>
             <a:endParaRPr lang="en-BE" dirty="0"/>
@@ -1804,10 +1799,9 @@
           <a:lstStyle/>
           <a:p>
             <a:r>
-              <a:rPr lang="en-BE"/>
+              <a:rPr lang="en-BE" dirty="0"/>
               <a:t>15/09/2026</a:t>
             </a:r>
-            <a:endParaRPr lang="en-BE" dirty="0"/>
           </a:p>
         </p:txBody>
       </p:sp>
@@ -1833,7 +1827,7 @@
           <a:lstStyle/>
           <a:p>
             <a:r>
-              <a:rPr lang="en-GB"/>
+              <a:rPr lang="en-GB" dirty="0"/>
               <a:t>NXDG 2026 -Ghent, Belgium</a:t>
             </a:r>
             <a:endParaRPr lang="en-BE" dirty="0"/>
@@ -2223,10 +2217,9 @@
           <a:lstStyle/>
           <a:p>
             <a:r>
-              <a:rPr lang="en-BE"/>
+              <a:rPr lang="en-BE" dirty="0"/>
               <a:t>15/09/2026</a:t>
             </a:r>
-            <a:endParaRPr lang="en-BE" dirty="0"/>
           </a:p>
         </p:txBody>
       </p:sp>
@@ -2252,7 +2245,7 @@
           <a:lstStyle/>
           <a:p>
             <a:r>
-              <a:rPr lang="en-GB"/>
+              <a:rPr lang="en-GB" dirty="0"/>
               <a:t>NXDG 2026 -Ghent, Belgium</a:t>
             </a:r>
             <a:endParaRPr lang="en-BE" dirty="0"/>
@@ -2369,10 +2362,9 @@
           <a:lstStyle/>
           <a:p>
             <a:r>
-              <a:rPr lang="en-BE"/>
+              <a:rPr lang="en-BE" dirty="0"/>
               <a:t>15/09/2026</a:t>
             </a:r>
-            <a:endParaRPr lang="en-BE" dirty="0"/>
           </a:p>
         </p:txBody>
       </p:sp>
@@ -2398,7 +2390,7 @@
           <a:lstStyle/>
           <a:p>
             <a:r>
-              <a:rPr lang="en-GB"/>
+              <a:rPr lang="en-GB" dirty="0"/>
               <a:t>NXDG 2026 -Ghent, Belgium</a:t>
             </a:r>
             <a:endParaRPr lang="en-BE" dirty="0"/>
@@ -2486,10 +2478,9 @@
           <a:lstStyle/>
           <a:p>
             <a:r>
-              <a:rPr lang="en-BE"/>
+              <a:rPr lang="en-BE" dirty="0"/>
               <a:t>15/09/2026</a:t>
             </a:r>
-            <a:endParaRPr lang="en-BE" dirty="0"/>
           </a:p>
         </p:txBody>
       </p:sp>
@@ -2515,7 +2506,7 @@
           <a:lstStyle/>
           <a:p>
             <a:r>
-              <a:rPr lang="en-GB"/>
+              <a:rPr lang="en-GB" dirty="0"/>
               <a:t>NXDG 2026 -Ghent, Belgium</a:t>
             </a:r>
             <a:endParaRPr lang="en-BE" dirty="0"/>
@@ -2803,10 +2794,9 @@
           <a:lstStyle/>
           <a:p>
             <a:r>
-              <a:rPr lang="en-BE"/>
+              <a:rPr lang="en-BE" dirty="0"/>
               <a:t>15/09/2026</a:t>
             </a:r>
-            <a:endParaRPr lang="en-BE" dirty="0"/>
           </a:p>
         </p:txBody>
       </p:sp>
@@ -2832,7 +2822,7 @@
           <a:lstStyle/>
           <a:p>
             <a:r>
-              <a:rPr lang="en-GB"/>
+              <a:rPr lang="en-GB" dirty="0"/>
               <a:t>NXDG 2026 -Ghent, Belgium</a:t>
             </a:r>
             <a:endParaRPr lang="en-BE" dirty="0"/>
@@ -3096,10 +3086,9 @@
           <a:lstStyle/>
           <a:p>
             <a:r>
-              <a:rPr lang="en-BE"/>
+              <a:rPr lang="en-BE" dirty="0"/>
               <a:t>15/09/2026</a:t>
             </a:r>
-            <a:endParaRPr lang="en-BE" dirty="0"/>
           </a:p>
         </p:txBody>
       </p:sp>
@@ -3125,7 +3114,7 @@
           <a:lstStyle/>
           <a:p>
             <a:r>
-              <a:rPr lang="en-GB"/>
+              <a:rPr lang="en-GB" dirty="0"/>
               <a:t>NXDG 2026 -Ghent, Belgium</a:t>
             </a:r>
             <a:endParaRPr lang="en-BE" dirty="0"/>
@@ -3349,10 +3338,9 @@
           </a:lstStyle>
           <a:p>
             <a:r>
-              <a:rPr lang="en-BE"/>
+              <a:rPr lang="en-BE" dirty="0"/>
               <a:t>15/09/2026</a:t>
             </a:r>
-            <a:endParaRPr lang="en-BE" dirty="0"/>
           </a:p>
         </p:txBody>
       </p:sp>
@@ -3396,7 +3384,7 @@
           </a:lstStyle>
           <a:p>
             <a:r>
-              <a:rPr lang="en-GB"/>
+              <a:rPr lang="en-GB" dirty="0"/>
               <a:t>NXDG 2026 -Ghent, Belgium</a:t>
             </a:r>
             <a:endParaRPr lang="en-BE" dirty="0"/>
@@ -3849,13 +3837,23 @@
           <a:p>
             <a:r>
               <a:rPr lang="en-GB" b="1" dirty="0">
-                <a:latin typeface="Abadi ExtraLight" panose="020B0204020104020204" pitchFamily="34" charset="0"/>
+                <a:solidFill>
+                  <a:schemeClr val="tx1">
+                    <a:lumMod val="95000"/>
+                    <a:lumOff val="5000"/>
+                  </a:schemeClr>
+                </a:solidFill>
               </a:rPr>
               <a:t>Deperias Kerre</a:t>
             </a:r>
             <a:r>
               <a:rPr lang="en-GB" dirty="0">
-                <a:latin typeface="Abadi ExtraLight" panose="020B0204020104020204" pitchFamily="34" charset="0"/>
+                <a:solidFill>
+                  <a:schemeClr val="tx1">
+                    <a:lumMod val="95000"/>
+                    <a:lumOff val="5000"/>
+                  </a:schemeClr>
+                </a:solidFill>
               </a:rPr>
               <a:t>, Christophe Debruyne</a:t>
             </a:r>
@@ -4084,7 +4082,7 @@
             </a:r>
             <a:r>
               <a:rPr lang="en-GB" sz="2000" dirty="0"/>
-              <a:t>European Open Data Portal is used as a case study. 23,777 datasets from the </a:t>
+              <a:t>European Open Data Portal used as a case study. 23,777 datasets from the </a:t>
             </a:r>
             <a:r>
               <a:rPr lang="en-GB" sz="2000" i="1" dirty="0"/>
@@ -4092,7 +4090,7 @@
             </a:r>
             <a:r>
               <a:rPr lang="en-GB" sz="2000" dirty="0"/>
-              <a:t>collection from the metadata dump</a:t>
+              <a:t>collection extracted from the metadata dump</a:t>
             </a:r>
             <a:r>
               <a:rPr lang="en-GB" sz="2000" baseline="30000" dirty="0"/>
@@ -6807,7 +6805,7 @@
         <p:spPr>
           <a:xfrm>
             <a:off x="936522" y="2212258"/>
-            <a:ext cx="9488129" cy="3477875"/>
+            <a:ext cx="9488129" cy="3170099"/>
           </a:xfrm>
           <a:prstGeom prst="rect">
             <a:avLst/>
@@ -6851,7 +6849,7 @@
             </a:r>
             <a:r>
               <a:rPr lang="en-GB" sz="2000" dirty="0"/>
-              <a:t>these findings highlight limitations in current metadata curation practices within open data portals hence the need to consider both aspects of semantic keyword quality. </a:t>
+              <a:t>current metadata curation practices within open data portals need to consider both aspects of semantic keyword quality. </a:t>
             </a:r>
           </a:p>
           <a:p>
@@ -6864,7 +6862,7 @@
             </a:pPr>
             <a:r>
               <a:rPr lang="en-GB" sz="2000" dirty="0"/>
-              <a:t>Data annotation guidelines should therefore consider not only: “Are keywords present?”, but also: “Do keywords accurately and comprehensively represent the semantic content of the metadata?”</a:t>
+              <a:t>Data annotation guidelines to consider not only: “Are keywords present?”, but also: “Do keywords accurately and comprehensively represent the semantic content of the metadata?”</a:t>
             </a:r>
           </a:p>
         </p:txBody>
@@ -7228,7 +7226,7 @@
         </p:nvSpPr>
         <p:spPr>
           <a:xfrm>
-            <a:off x="1133519" y="1279693"/>
+            <a:off x="1113855" y="906067"/>
             <a:ext cx="9488129" cy="3554819"/>
           </a:xfrm>
           <a:prstGeom prst="rect">
@@ -7358,46 +7356,6 @@
               <a:t>develop a human-annotated reference dataset, validate computational SKQ against human judgments, and investigate whether higher SKQ improves dataset discoverability and retrieval.</a:t>
             </a:r>
             <a:endParaRPr lang="en-GB" sz="2000" b="1" i="1" dirty="0"/>
-          </a:p>
-        </p:txBody>
-      </p:sp>
-      <p:sp>
-        <p:nvSpPr>
-          <p:cNvPr id="3" name="TextBox 2">
-            <a:extLst>
-              <a:ext uri="{FF2B5EF4-FFF2-40B4-BE49-F238E27FC236}">
-                <a16:creationId xmlns:a16="http://schemas.microsoft.com/office/drawing/2014/main" id="{F8601144-F8D6-3834-C6F3-B19AA667A3D3}"/>
-              </a:ext>
-            </a:extLst>
-          </p:cNvPr>
-          <p:cNvSpPr txBox="1"/>
-          <p:nvPr/>
-        </p:nvSpPr>
-        <p:spPr>
-          <a:xfrm>
-            <a:off x="1032387" y="764256"/>
-            <a:ext cx="10127226" cy="400110"/>
-          </a:xfrm>
-          <a:prstGeom prst="rect">
-            <a:avLst/>
-          </a:prstGeom>
-          <a:noFill/>
-        </p:spPr>
-        <p:txBody>
-          <a:bodyPr wrap="square" rtlCol="0">
-            <a:spAutoFit/>
-          </a:bodyPr>
-          <a:lstStyle/>
-          <a:p>
-            <a:r>
-              <a:rPr lang="en-GB" sz="2000" b="1" i="1" dirty="0">
-                <a:solidFill>
-                  <a:srgbClr val="7030A0"/>
-                </a:solidFill>
-              </a:rPr>
-              <a:t>Summary</a:t>
-            </a:r>
-            <a:endParaRPr lang="en-BE" sz="2000" b="1" dirty="0"/>
           </a:p>
         </p:txBody>
       </p:sp>
@@ -7854,8 +7812,8 @@
         </p:nvSpPr>
         <p:spPr>
           <a:xfrm>
-            <a:off x="926690" y="764256"/>
-            <a:ext cx="10127226" cy="400110"/>
+            <a:off x="926690" y="624155"/>
+            <a:ext cx="10127226" cy="523220"/>
           </a:xfrm>
           <a:prstGeom prst="rect">
             <a:avLst/>
@@ -7869,14 +7827,14 @@
           <a:lstStyle/>
           <a:p>
             <a:r>
-              <a:rPr lang="en-GB" sz="2000" b="1" i="1" dirty="0">
+              <a:rPr lang="en-GB" sz="2800" b="1" i="1" dirty="0">
                 <a:solidFill>
                   <a:srgbClr val="7030A0"/>
                 </a:solidFill>
               </a:rPr>
               <a:t>Acknowledgements</a:t>
             </a:r>
-            <a:endParaRPr lang="en-BE" sz="2000" b="1" dirty="0"/>
+            <a:endParaRPr lang="en-BE" sz="2800" b="1" dirty="0"/>
           </a:p>
         </p:txBody>
       </p:sp>
@@ -7894,8 +7852,8 @@
         </p:nvSpPr>
         <p:spPr>
           <a:xfrm>
-            <a:off x="926690" y="1915675"/>
-            <a:ext cx="10127226" cy="400110"/>
+            <a:off x="926690" y="1799762"/>
+            <a:ext cx="10127226" cy="523220"/>
           </a:xfrm>
           <a:prstGeom prst="rect">
             <a:avLst/>
@@ -7909,14 +7867,14 @@
           <a:lstStyle/>
           <a:p>
             <a:r>
-              <a:rPr lang="en-GB" sz="2000" b="1" i="1" dirty="0">
+              <a:rPr lang="en-GB" sz="2800" b="1" i="1" dirty="0">
                 <a:solidFill>
                   <a:srgbClr val="7030A0"/>
                 </a:solidFill>
               </a:rPr>
               <a:t>Availability of Resources</a:t>
             </a:r>
-            <a:endParaRPr lang="en-BE" sz="2000" b="1" dirty="0"/>
+            <a:endParaRPr lang="en-BE" sz="2800" b="1" dirty="0"/>
           </a:p>
         </p:txBody>
       </p:sp>
@@ -7934,7 +7892,7 @@
         </p:nvSpPr>
         <p:spPr>
           <a:xfrm>
-            <a:off x="2209801" y="1159817"/>
+            <a:off x="2209800" y="1076486"/>
             <a:ext cx="8251370" cy="707886"/>
           </a:xfrm>
           <a:prstGeom prst="rect">
@@ -8081,18 +8039,13 @@
               <a:defRPr sz="2200"/>
             </a:pPr>
             <a:r>
-              <a:rPr lang="en-GB" sz="2000" dirty="0" err="1">
+              <a:rPr lang="en-GB" sz="2000" dirty="0">
                 <a:solidFill>
                   <a:srgbClr val="0070C0"/>
                 </a:solidFill>
               </a:rPr>
               <a:t>Zenodo</a:t>
             </a:r>
-            <a:endParaRPr lang="en-GB" sz="2000" dirty="0">
-              <a:solidFill>
-                <a:srgbClr val="0070C0"/>
-              </a:solidFill>
-            </a:endParaRPr>
           </a:p>
         </p:txBody>
       </p:sp>
@@ -9946,15 +9899,7 @@
           <a:p>
             <a:r>
               <a:rPr lang="en-GB" sz="1400" dirty="0"/>
-              <a:t>3. J. Martinez-Gil, Framework to automatically determine the quality of open data </a:t>
-            </a:r>
-            <a:r>
-              <a:rPr lang="en-GB" sz="1400" dirty="0" err="1"/>
-              <a:t>catalogs</a:t>
-            </a:r>
-            <a:r>
-              <a:rPr lang="en-GB" sz="1400" dirty="0"/>
-              <a:t>, Expert Systems with Applications 289 (2025) 128379. doi:10.1016/j.eswa.2025.128379.</a:t>
+              <a:t>3. J. Martinez-Gil, Framework to automatically determine the quality of open data catalogs, Expert Systems with Applications 289 (2025) 128379. doi:10.1016/j.eswa.2025.128379.</a:t>
             </a:r>
             <a:endParaRPr lang="en-BE" sz="1400" dirty="0"/>
           </a:p>
@@ -12044,7 +11989,7 @@
             </a:r>
             <a:r>
               <a:rPr lang="en-GB" sz="2000" dirty="0"/>
-              <a:t>that combines the semantic representations of all keywords into a collective representation.</a:t>
+              <a:t>combining the semantic representations of all keywords into a collective representation.</a:t>
             </a:r>
           </a:p>
           <a:p>
@@ -12985,7 +12930,7 @@
             </a:r>
             <a:r>
               <a:rPr lang="en-GB" sz="2000" dirty="0"/>
-              <a:t>of individual keywords with a metadata field, determined by computing the similarity between each keyword and the metadata field, then taking the average.</a:t>
+              <a:t>of individual keywords with a metadata field.</a:t>
             </a:r>
           </a:p>
           <a:p>
@@ -13152,7 +13097,7 @@
         </p:blipFill>
         <p:spPr>
           <a:xfrm>
-            <a:off x="2762864" y="4500009"/>
+            <a:off x="2644877" y="4023902"/>
             <a:ext cx="6046839" cy="1253459"/>
           </a:xfrm>
           <a:prstGeom prst="rect">
@@ -13751,7 +13696,7 @@
           <a:p>
             <a:r>
               <a:rPr lang="en-GB" sz="2000" dirty="0"/>
-              <a:t>Concepts are not directly observable at scale, hence operationalized using a set of metadata-derived keywords 𝐾′</a:t>
+              <a:t>Concepts not directly observable at scale, operationalized using a set of metadata-derived keywords 𝐾′</a:t>
             </a:r>
             <a:r>
               <a:rPr lang="en-BE" sz="2000" baseline="-25000" dirty="0"/>
@@ -13785,18 +13730,7 @@
               <a:rPr lang="en-GB" sz="2000" baseline="-25000" dirty="0"/>
               <a:t>𝑑</a:t>
             </a:r>
-            <a:r>
-              <a:rPr lang="en-GB" sz="2000" dirty="0"/>
-              <a:t>, which serves as a proxy representation of 𝐶</a:t>
-            </a:r>
-            <a:r>
-              <a:rPr lang="en-GB" sz="2000" baseline="-25000" dirty="0"/>
-              <a:t>𝑑</a:t>
-            </a:r>
-            <a:r>
-              <a:rPr lang="en-GB" sz="2000" dirty="0"/>
-              <a:t>.</a:t>
-            </a:r>
+            <a:endParaRPr lang="en-GB" sz="2000" dirty="0"/>
           </a:p>
           <a:p>
             <a:r>

--- a/slides/nxdg_2026_Deperias.pptx
+++ b/slides/nxdg_2026_Deperias.pptx
@@ -214,7 +214,7 @@
           <a:p>
             <a:fld id="{DB5D3ED2-8864-4DD6-A3F8-C2211C0978B4}" type="datetimeFigureOut">
               <a:rPr lang="en-BE" smtClean="0"/>
-              <a:t>08/09/2026</a:t>
+              <a:t>09/09/2026</a:t>
             </a:fld>
             <a:endParaRPr lang="en-BE" dirty="0"/>
           </a:p>
@@ -480,6 +480,90 @@
     </a:lvl9pPr>
   </p:notesStyle>
 </p:notesMaster>
+</file>
+
+<file path=ppt/notesSlides/notesSlide1.xml><?xml version="1.0" encoding="utf-8"?>
+<p:notes xmlns:a="http://schemas.openxmlformats.org/drawingml/2006/main" xmlns:r="http://schemas.openxmlformats.org/officeDocument/2006/relationships" xmlns:p="http://schemas.openxmlformats.org/presentationml/2006/main">
+  <p:cSld>
+    <p:spTree>
+      <p:nvGrpSpPr>
+        <p:cNvPr id="1" name=""/>
+        <p:cNvGrpSpPr/>
+        <p:nvPr/>
+      </p:nvGrpSpPr>
+      <p:grpSpPr>
+        <a:xfrm>
+          <a:off x="0" y="0"/>
+          <a:ext cx="0" cy="0"/>
+          <a:chOff x="0" y="0"/>
+          <a:chExt cx="0" cy="0"/>
+        </a:xfrm>
+      </p:grpSpPr>
+      <p:sp>
+        <p:nvSpPr>
+          <p:cNvPr id="2" name="Slide Image Placeholder 1"/>
+          <p:cNvSpPr>
+            <a:spLocks noGrp="1" noRot="1" noChangeAspect="1"/>
+          </p:cNvSpPr>
+          <p:nvPr>
+            <p:ph type="sldImg"/>
+          </p:nvPr>
+        </p:nvSpPr>
+        <p:spPr/>
+      </p:sp>
+      <p:sp>
+        <p:nvSpPr>
+          <p:cNvPr id="3" name="Notes Placeholder 2"/>
+          <p:cNvSpPr>
+            <a:spLocks noGrp="1"/>
+          </p:cNvSpPr>
+          <p:nvPr>
+            <p:ph type="body" idx="1"/>
+          </p:nvPr>
+        </p:nvSpPr>
+        <p:spPr/>
+        <p:txBody>
+          <a:bodyPr/>
+          <a:lstStyle/>
+          <a:p>
+            <a:endParaRPr lang="en-BE" dirty="0"/>
+          </a:p>
+        </p:txBody>
+      </p:sp>
+      <p:sp>
+        <p:nvSpPr>
+          <p:cNvPr id="4" name="Slide Number Placeholder 3"/>
+          <p:cNvSpPr>
+            <a:spLocks noGrp="1"/>
+          </p:cNvSpPr>
+          <p:nvPr>
+            <p:ph type="sldNum" sz="quarter" idx="5"/>
+          </p:nvPr>
+        </p:nvSpPr>
+        <p:spPr/>
+        <p:txBody>
+          <a:bodyPr/>
+          <a:lstStyle/>
+          <a:p>
+            <a:fld id="{A2E8D2CC-85FC-47EA-B96A-383D32595225}" type="slidenum">
+              <a:rPr lang="en-BE" smtClean="0"/>
+              <a:t>11</a:t>
+            </a:fld>
+            <a:endParaRPr lang="en-BE" dirty="0"/>
+          </a:p>
+        </p:txBody>
+      </p:sp>
+    </p:spTree>
+    <p:extLst>
+      <p:ext uri="{BB962C8B-B14F-4D97-AF65-F5344CB8AC3E}">
+        <p14:creationId xmlns:p14="http://schemas.microsoft.com/office/powerpoint/2010/main" val="2876925136"/>
+      </p:ext>
+    </p:extLst>
+  </p:cSld>
+  <p:clrMapOvr>
+    <a:masterClrMapping/>
+  </p:clrMapOvr>
+</p:notes>
 </file>
 
 <file path=ppt/slideLayouts/slideLayout1.xml><?xml version="1.0" encoding="utf-8"?>
@@ -3920,7 +4004,7 @@
         </p:blipFill>
         <p:spPr>
           <a:xfrm>
-            <a:off x="8618268" y="5454446"/>
+            <a:off x="9424513" y="5495646"/>
             <a:ext cx="2251000" cy="882062"/>
           </a:xfrm>
           <a:prstGeom prst="rect">
@@ -3953,7 +4037,7 @@
         </p:blipFill>
         <p:spPr>
           <a:xfrm>
-            <a:off x="978603" y="5342686"/>
+            <a:off x="83867" y="5374019"/>
             <a:ext cx="3554730" cy="993822"/>
           </a:xfrm>
           <a:prstGeom prst="rect">
@@ -3963,6 +4047,42 @@
           <a:ln>
             <a:noFill/>
           </a:ln>
+        </p:spPr>
+      </p:pic>
+      <p:pic>
+        <p:nvPicPr>
+          <p:cNvPr id="4" name="Picture 3">
+            <a:extLst>
+              <a:ext uri="{FF2B5EF4-FFF2-40B4-BE49-F238E27FC236}">
+                <a16:creationId xmlns:a16="http://schemas.microsoft.com/office/drawing/2014/main" id="{6355CA7C-F689-EBEA-2B64-85D4D9DD1F4F}"/>
+              </a:ext>
+            </a:extLst>
+          </p:cNvPr>
+          <p:cNvPicPr>
+            <a:picLocks noChangeAspect="1"/>
+          </p:cNvPicPr>
+          <p:nvPr/>
+        </p:nvPicPr>
+        <p:blipFill>
+          <a:blip r:embed="rId4">
+            <a:extLst>
+              <a:ext uri="{28A0092B-C50C-407E-A947-70E740481C1C}">
+                <a14:useLocalDpi xmlns:a14="http://schemas.microsoft.com/office/drawing/2010/main" val="0"/>
+              </a:ext>
+            </a:extLst>
+          </a:blip>
+          <a:stretch>
+            <a:fillRect/>
+          </a:stretch>
+        </p:blipFill>
+        <p:spPr>
+          <a:xfrm>
+            <a:off x="4882477" y="5470027"/>
+            <a:ext cx="2338555" cy="898886"/>
+          </a:xfrm>
+          <a:prstGeom prst="rect">
+            <a:avLst/>
+          </a:prstGeom>
         </p:spPr>
       </p:pic>
     </p:spTree>
@@ -4301,7 +4421,7 @@
         <p:spPr>
           <a:xfrm>
             <a:off x="1093839" y="2634923"/>
-            <a:ext cx="10589342" cy="1451679"/>
+            <a:ext cx="10589342" cy="1938992"/>
           </a:xfrm>
           <a:prstGeom prst="rect">
             <a:avLst/>
@@ -4315,21 +4435,20 @@
           <a:lstStyle/>
           <a:p>
             <a:pPr marL="342900" indent="-342900">
-              <a:spcAft>
-                <a:spcPts val="1000"/>
-              </a:spcAft>
               <a:buFont typeface="Arial" panose="020B0604020202020204" pitchFamily="34" charset="0"/>
               <a:buChar char="•"/>
-              <a:defRPr sz="1800"/>
             </a:pPr>
             <a:r>
               <a:rPr lang="en-GB" sz="2000" b="1" dirty="0"/>
-              <a:t>Keywords Baseline: </a:t>
+              <a:t>Keywords Baseline and the Embedding Model: </a:t>
             </a:r>
             <a:r>
               <a:rPr lang="en-GB" sz="2000" dirty="0"/>
-              <a:t>metadata concepts approximated using KeyBERT; robustness checked using YAKE.</a:t>
-            </a:r>
+              <a:t>metadata concepts approximated using KeyBERT; robustness checked using YAKE. Adopted all-MiniLM-L6-v2 model for computing embeddings.</a:t>
+            </a:r>
+          </a:p>
+          <a:p>
+            <a:endParaRPr lang="en-GB" sz="2000" dirty="0"/>
           </a:p>
           <a:p>
             <a:pPr marL="342900" indent="-342900">
@@ -4522,7 +4641,7 @@
                                         <p:tgtEl>
                                           <p:spTgt spid="9">
                                             <p:txEl>
-                                              <p:pRg st="1" end="1"/>
+                                              <p:pRg st="2" end="2"/>
                                             </p:txEl>
                                           </p:spTgt>
                                         </p:tgtEl>
@@ -7767,7 +7886,7 @@
         </p:nvSpPr>
         <p:spPr>
           <a:xfrm>
-            <a:off x="2353499" y="2315785"/>
+            <a:off x="2139315" y="2886625"/>
             <a:ext cx="1040815" cy="400110"/>
           </a:xfrm>
           <a:prstGeom prst="rect">
@@ -7852,7 +7971,7 @@
         </p:nvSpPr>
         <p:spPr>
           <a:xfrm>
-            <a:off x="926690" y="1799762"/>
+            <a:off x="926690" y="2299972"/>
             <a:ext cx="10127226" cy="523220"/>
           </a:xfrm>
           <a:prstGeom prst="rect">
@@ -7872,7 +7991,11 @@
                   <a:srgbClr val="7030A0"/>
                 </a:solidFill>
               </a:rPr>
-              <a:t>Availability of Resources</a:t>
+              <a:t>Availability of Resources: </a:t>
+            </a:r>
+            <a:r>
+              <a:rPr lang="en-GB" sz="2800" b="1" i="1" dirty="0"/>
+              <a:t>Code and Data</a:t>
             </a:r>
             <a:endParaRPr lang="en-BE" sz="2800" b="1" dirty="0"/>
           </a:p>
@@ -7893,7 +8016,7 @@
         <p:spPr>
           <a:xfrm>
             <a:off x="2209800" y="1076486"/>
-            <a:ext cx="8251370" cy="707886"/>
+            <a:ext cx="8251370" cy="1169551"/>
           </a:xfrm>
           <a:prstGeom prst="rect">
             <a:avLst/>
@@ -7918,47 +8041,27 @@
             </a:pPr>
             <a:r>
               <a:rPr lang="en-GB" sz="2000" dirty="0"/>
-              <a:t>This work was supported by the Fonds de la Recherche Scientifique – FNRS under Grant n° MIS F.4016.24.</a:t>
-            </a:r>
-          </a:p>
-        </p:txBody>
-      </p:sp>
-      <p:pic>
-        <p:nvPicPr>
-          <p:cNvPr id="9" name="Picture 8">
-            <a:extLst>
-              <a:ext uri="{FF2B5EF4-FFF2-40B4-BE49-F238E27FC236}">
-                <a16:creationId xmlns:a16="http://schemas.microsoft.com/office/drawing/2014/main" id="{AF347FD1-315A-6C84-0584-F77FA9B69B25}"/>
-              </a:ext>
-            </a:extLst>
-          </p:cNvPr>
-          <p:cNvPicPr>
-            <a:picLocks noChangeAspect="1"/>
-          </p:cNvPicPr>
-          <p:nvPr/>
-        </p:nvPicPr>
-        <p:blipFill>
-          <a:blip r:embed="rId2">
-            <a:extLst>
-              <a:ext uri="{28A0092B-C50C-407E-A947-70E740481C1C}">
-                <a14:useLocalDpi xmlns:a14="http://schemas.microsoft.com/office/drawing/2010/main" val="0"/>
-              </a:ext>
-            </a:extLst>
-          </a:blip>
-          <a:stretch>
-            <a:fillRect/>
-          </a:stretch>
-        </p:blipFill>
-        <p:spPr>
-          <a:xfrm>
-            <a:off x="1447956" y="2715895"/>
-            <a:ext cx="3222016" cy="3222016"/>
-          </a:xfrm>
-          <a:prstGeom prst="rect">
-            <a:avLst/>
-          </a:prstGeom>
-        </p:spPr>
-      </p:pic>
+              <a:t>This work was primarily funded by the Fonds de la Recherche Scientifique – FNRS under Grant No. MIS F.4016.24.</a:t>
+            </a:r>
+          </a:p>
+          <a:p>
+            <a:pPr marL="285750" lvl="0" indent="-285750" algn="l" rtl="0">
+              <a:spcBef>
+                <a:spcPts val="0"/>
+              </a:spcBef>
+              <a:spcAft>
+                <a:spcPts val="1200"/>
+              </a:spcAft>
+              <a:buFont typeface="Arial" panose="020B0604020202020204" pitchFamily="34" charset="0"/>
+              <a:buChar char="•"/>
+            </a:pPr>
+            <a:r>
+              <a:rPr lang="en-GB" sz="2000" dirty="0"/>
+              <a:t>Partial mobility support by Strathmore University.</a:t>
+            </a:r>
+          </a:p>
+        </p:txBody>
+      </p:sp>
       <p:sp>
         <p:nvSpPr>
           <p:cNvPr id="10" name="TextBox 9">
@@ -7999,7 +8102,7 @@
                   <a:srgbClr val="C00000"/>
                 </a:solidFill>
               </a:rPr>
-              <a:t>Link: https://github.com/DeperiasKerre/keyword_quality_eval</a:t>
+              <a:t>https://github.com/DeperiasKerre/keyword_quality_eval</a:t>
             </a:r>
           </a:p>
         </p:txBody>
@@ -8018,7 +8121,7 @@
         </p:nvSpPr>
         <p:spPr>
           <a:xfrm>
-            <a:off x="8112042" y="2363757"/>
+            <a:off x="8236688" y="2900136"/>
             <a:ext cx="1040815" cy="400110"/>
           </a:xfrm>
           <a:prstGeom prst="rect">
@@ -8049,42 +8152,6 @@
           </a:p>
         </p:txBody>
       </p:sp>
-      <p:pic>
-        <p:nvPicPr>
-          <p:cNvPr id="13" name="Picture 12">
-            <a:extLst>
-              <a:ext uri="{FF2B5EF4-FFF2-40B4-BE49-F238E27FC236}">
-                <a16:creationId xmlns:a16="http://schemas.microsoft.com/office/drawing/2014/main" id="{CF5D65D9-1106-A190-7052-C25DF09CC255}"/>
-              </a:ext>
-            </a:extLst>
-          </p:cNvPr>
-          <p:cNvPicPr>
-            <a:picLocks noChangeAspect="1"/>
-          </p:cNvPicPr>
-          <p:nvPr/>
-        </p:nvPicPr>
-        <p:blipFill>
-          <a:blip r:embed="rId3">
-            <a:extLst>
-              <a:ext uri="{28A0092B-C50C-407E-A947-70E740481C1C}">
-                <a14:useLocalDpi xmlns:a14="http://schemas.microsoft.com/office/drawing/2010/main" val="0"/>
-              </a:ext>
-            </a:extLst>
-          </a:blip>
-          <a:stretch>
-            <a:fillRect/>
-          </a:stretch>
-        </p:blipFill>
-        <p:spPr>
-          <a:xfrm>
-            <a:off x="7097486" y="2715895"/>
-            <a:ext cx="3141013" cy="3141013"/>
-          </a:xfrm>
-          <a:prstGeom prst="rect">
-            <a:avLst/>
-          </a:prstGeom>
-        </p:spPr>
-      </p:pic>
       <p:sp>
         <p:nvSpPr>
           <p:cNvPr id="15" name="TextBox 14">
@@ -8216,6 +8283,78 @@
           </a:p>
         </p:txBody>
       </p:sp>
+      <p:pic>
+        <p:nvPicPr>
+          <p:cNvPr id="8" name="Picture 7">
+            <a:extLst>
+              <a:ext uri="{FF2B5EF4-FFF2-40B4-BE49-F238E27FC236}">
+                <a16:creationId xmlns:a16="http://schemas.microsoft.com/office/drawing/2014/main" id="{8B53AEA4-6EA1-6289-F61B-857B736DD4A1}"/>
+              </a:ext>
+            </a:extLst>
+          </p:cNvPr>
+          <p:cNvPicPr>
+            <a:picLocks noChangeAspect="1"/>
+          </p:cNvPicPr>
+          <p:nvPr/>
+        </p:nvPicPr>
+        <p:blipFill>
+          <a:blip r:embed="rId2">
+            <a:extLst>
+              <a:ext uri="{28A0092B-C50C-407E-A947-70E740481C1C}">
+                <a14:useLocalDpi xmlns:a14="http://schemas.microsoft.com/office/drawing/2010/main" val="0"/>
+              </a:ext>
+            </a:extLst>
+          </a:blip>
+          <a:stretch>
+            <a:fillRect/>
+          </a:stretch>
+        </p:blipFill>
+        <p:spPr>
+          <a:xfrm>
+            <a:off x="1280847" y="3300246"/>
+            <a:ext cx="2757753" cy="2757753"/>
+          </a:xfrm>
+          <a:prstGeom prst="rect">
+            <a:avLst/>
+          </a:prstGeom>
+        </p:spPr>
+      </p:pic>
+      <p:pic>
+        <p:nvPicPr>
+          <p:cNvPr id="14" name="Picture 13">
+            <a:extLst>
+              <a:ext uri="{FF2B5EF4-FFF2-40B4-BE49-F238E27FC236}">
+                <a16:creationId xmlns:a16="http://schemas.microsoft.com/office/drawing/2014/main" id="{FDBECBF4-7196-F740-3744-77FC92725B8A}"/>
+              </a:ext>
+            </a:extLst>
+          </p:cNvPr>
+          <p:cNvPicPr>
+            <a:picLocks noChangeAspect="1"/>
+          </p:cNvPicPr>
+          <p:nvPr/>
+        </p:nvPicPr>
+        <p:blipFill>
+          <a:blip r:embed="rId3">
+            <a:extLst>
+              <a:ext uri="{28A0092B-C50C-407E-A947-70E740481C1C}">
+                <a14:useLocalDpi xmlns:a14="http://schemas.microsoft.com/office/drawing/2010/main" val="0"/>
+              </a:ext>
+            </a:extLst>
+          </a:blip>
+          <a:stretch>
+            <a:fillRect/>
+          </a:stretch>
+        </p:blipFill>
+        <p:spPr>
+          <a:xfrm>
+            <a:off x="7342475" y="3264502"/>
+            <a:ext cx="2829242" cy="2829242"/>
+          </a:xfrm>
+          <a:prstGeom prst="rect">
+            <a:avLst/>
+          </a:prstGeom>
+        </p:spPr>
+      </p:pic>
     </p:spTree>
     <p:extLst>
       <p:ext uri="{BB962C8B-B14F-4D97-AF65-F5344CB8AC3E}">
@@ -8381,7 +8520,7 @@
                                           </p:stCondLst>
                                         </p:cTn>
                                         <p:tgtEl>
-                                          <p:spTgt spid="9"/>
+                                          <p:spTgt spid="8"/>
                                         </p:tgtEl>
                                         <p:attrNameLst>
                                           <p:attrName>style.visibility</p:attrName>
@@ -8480,7 +8619,7 @@
                                           </p:stCondLst>
                                         </p:cTn>
                                         <p:tgtEl>
-                                          <p:spTgt spid="13"/>
+                                          <p:spTgt spid="14"/>
                                         </p:tgtEl>
                                         <p:attrNameLst>
                                           <p:attrName>style.visibility</p:attrName>
@@ -8990,52 +9129,6 @@
               <a:rPr lang="en-GB" dirty="0"/>
               <a:t>that describes it [1].</a:t>
             </a:r>
-            <a:endParaRPr lang="en-BE" dirty="0"/>
-          </a:p>
-        </p:txBody>
-      </p:sp>
-      <p:sp>
-        <p:nvSpPr>
-          <p:cNvPr id="12" name="TextBox 11">
-            <a:extLst>
-              <a:ext uri="{FF2B5EF4-FFF2-40B4-BE49-F238E27FC236}">
-                <a16:creationId xmlns:a16="http://schemas.microsoft.com/office/drawing/2014/main" id="{F5F0404C-1ADB-E757-A343-1FA5CBF099A1}"/>
-              </a:ext>
-            </a:extLst>
-          </p:cNvPr>
-          <p:cNvSpPr txBox="1"/>
-          <p:nvPr/>
-        </p:nvSpPr>
-        <p:spPr>
-          <a:xfrm>
-            <a:off x="1005349" y="3775848"/>
-            <a:ext cx="10616380" cy="1113125"/>
-          </a:xfrm>
-          <a:prstGeom prst="rect">
-            <a:avLst/>
-          </a:prstGeom>
-          <a:noFill/>
-        </p:spPr>
-        <p:txBody>
-          <a:bodyPr wrap="square" rtlCol="0">
-            <a:spAutoFit/>
-          </a:bodyPr>
-          <a:lstStyle/>
-          <a:p>
-            <a:pPr marL="342900" indent="-342900">
-              <a:spcAft>
-                <a:spcPts val="1000"/>
-              </a:spcAft>
-              <a:buFont typeface="Arial" panose="020B0604020202020204" pitchFamily="34" charset="0"/>
-              <a:buChar char="•"/>
-              <a:defRPr sz="2000"/>
-            </a:pPr>
-            <a:r>
-              <a:rPr lang="en-GB" dirty="0"/>
-              <a:t>Keywords support metadata search yet the quality of keywords in relation to the descriptive metadata is unexplored. </a:t>
-            </a:r>
-          </a:p>
-          <a:p>
             <a:endParaRPr lang="en-BE" dirty="0"/>
           </a:p>
         </p:txBody>
@@ -9183,55 +9276,6 @@
                       </p:childTnLst>
                     </p:cTn>
                   </p:par>
-                  <p:par>
-                    <p:cTn id="13" fill="hold">
-                      <p:stCondLst>
-                        <p:cond delay="indefinite"/>
-                      </p:stCondLst>
-                      <p:childTnLst>
-                        <p:par>
-                          <p:cTn id="14" fill="hold">
-                            <p:stCondLst>
-                              <p:cond delay="0"/>
-                            </p:stCondLst>
-                            <p:childTnLst>
-                              <p:par>
-                                <p:cTn id="15" presetID="1" presetClass="entr" presetSubtype="0" fill="hold" nodeType="clickEffect">
-                                  <p:stCondLst>
-                                    <p:cond delay="0"/>
-                                  </p:stCondLst>
-                                  <p:childTnLst>
-                                    <p:set>
-                                      <p:cBhvr>
-                                        <p:cTn id="16" dur="1" fill="hold">
-                                          <p:stCondLst>
-                                            <p:cond delay="0"/>
-                                          </p:stCondLst>
-                                        </p:cTn>
-                                        <p:tgtEl>
-                                          <p:spTgt spid="12">
-                                            <p:txEl>
-                                              <p:pRg st="0" end="0"/>
-                                            </p:txEl>
-                                          </p:spTgt>
-                                        </p:tgtEl>
-                                        <p:attrNameLst>
-                                          <p:attrName>style.visibility</p:attrName>
-                                        </p:attrNameLst>
-                                      </p:cBhvr>
-                                      <p:to>
-                                        <p:strVal val="visible"/>
-                                      </p:to>
-                                    </p:set>
-                                  </p:childTnLst>
-                                </p:cTn>
-                              </p:par>
-                            </p:childTnLst>
-                          </p:cTn>
-                        </p:par>
-                      </p:childTnLst>
-                    </p:cTn>
-                  </p:par>
                 </p:childTnLst>
               </p:cTn>
               <p:prevCondLst>
@@ -9314,7 +9358,7 @@
           <a:p>
             <a:r>
               <a:rPr lang="en-GB" sz="2000" b="1" i="1" dirty="0"/>
-              <a:t>Metadata-driven dataset discovery in open data portals: </a:t>
+              <a:t>  Metadata-driven dataset discovery in open data portals: </a:t>
             </a:r>
             <a:r>
               <a:rPr lang="en-GB" sz="2000" dirty="0"/>
@@ -9527,8 +9571,54 @@
             </a:r>
             <a:r>
               <a:rPr lang="en-GB" sz="2000" dirty="0"/>
-              <a:t>“documents are linked thematically with each other when they have been indexed with the same tags” [2]. </a:t>
-            </a:r>
+              <a:t>“Documents are linked thematically with each other when they have been indexed with the same tags” [2]. </a:t>
+            </a:r>
+          </a:p>
+        </p:txBody>
+      </p:sp>
+      <p:sp>
+        <p:nvSpPr>
+          <p:cNvPr id="12" name="TextBox 11">
+            <a:extLst>
+              <a:ext uri="{FF2B5EF4-FFF2-40B4-BE49-F238E27FC236}">
+                <a16:creationId xmlns:a16="http://schemas.microsoft.com/office/drawing/2014/main" id="{F5F0404C-1ADB-E757-A343-1FA5CBF099A1}"/>
+              </a:ext>
+            </a:extLst>
+          </p:cNvPr>
+          <p:cNvSpPr txBox="1"/>
+          <p:nvPr/>
+        </p:nvSpPr>
+        <p:spPr>
+          <a:xfrm>
+            <a:off x="1005349" y="3901833"/>
+            <a:ext cx="10616380" cy="1113125"/>
+          </a:xfrm>
+          <a:prstGeom prst="rect">
+            <a:avLst/>
+          </a:prstGeom>
+          <a:noFill/>
+        </p:spPr>
+        <p:txBody>
+          <a:bodyPr wrap="square" rtlCol="0">
+            <a:spAutoFit/>
+          </a:bodyPr>
+          <a:lstStyle/>
+          <a:p>
+            <a:pPr marL="342900" indent="-342900">
+              <a:spcAft>
+                <a:spcPts val="1000"/>
+              </a:spcAft>
+              <a:buFont typeface="Arial" panose="020B0604020202020204" pitchFamily="34" charset="0"/>
+              <a:buChar char="•"/>
+              <a:defRPr sz="2000"/>
+            </a:pPr>
+            <a:r>
+              <a:rPr lang="en-GB" dirty="0"/>
+              <a:t>Keywords support metadata search yet the quality of keywords in relation to the descriptive metadata is unexplored. </a:t>
+            </a:r>
+          </a:p>
+          <a:p>
+            <a:endParaRPr lang="en-BE" dirty="0"/>
           </a:p>
         </p:txBody>
       </p:sp>
@@ -9653,6 +9743,55 @@
                                         </p:cTn>
                                         <p:tgtEl>
                                           <p:spTgt spid="8">
+                                            <p:txEl>
+                                              <p:pRg st="0" end="0"/>
+                                            </p:txEl>
+                                          </p:spTgt>
+                                        </p:tgtEl>
+                                        <p:attrNameLst>
+                                          <p:attrName>style.visibility</p:attrName>
+                                        </p:attrNameLst>
+                                      </p:cBhvr>
+                                      <p:to>
+                                        <p:strVal val="visible"/>
+                                      </p:to>
+                                    </p:set>
+                                  </p:childTnLst>
+                                </p:cTn>
+                              </p:par>
+                            </p:childTnLst>
+                          </p:cTn>
+                        </p:par>
+                      </p:childTnLst>
+                    </p:cTn>
+                  </p:par>
+                  <p:par>
+                    <p:cTn id="13" fill="hold">
+                      <p:stCondLst>
+                        <p:cond delay="indefinite"/>
+                      </p:stCondLst>
+                      <p:childTnLst>
+                        <p:par>
+                          <p:cTn id="14" fill="hold">
+                            <p:stCondLst>
+                              <p:cond delay="0"/>
+                            </p:stCondLst>
+                            <p:childTnLst>
+                              <p:par>
+                                <p:cTn id="15" presetID="1" presetClass="entr" presetSubtype="0" fill="hold" nodeType="clickEffect">
+                                  <p:stCondLst>
+                                    <p:cond delay="0"/>
+                                  </p:stCondLst>
+                                  <p:childTnLst>
+                                    <p:set>
+                                      <p:cBhvr>
+                                        <p:cTn id="16" dur="1" fill="hold">
+                                          <p:stCondLst>
+                                            <p:cond delay="0"/>
+                                          </p:stCondLst>
+                                        </p:cTn>
+                                        <p:tgtEl>
+                                          <p:spTgt spid="12">
                                             <p:txEl>
                                               <p:pRg st="0" end="0"/>
                                             </p:txEl>
@@ -11396,7 +11535,7 @@
         </p:nvSpPr>
         <p:spPr>
           <a:xfrm>
-            <a:off x="1005349" y="1908997"/>
+            <a:off x="936522" y="1604198"/>
             <a:ext cx="10515600" cy="2141894"/>
           </a:xfrm>
         </p:spPr>
@@ -11441,8 +11580,12 @@
               <a:defRPr sz="2000"/>
             </a:pPr>
             <a:r>
+              <a:rPr lang="en-GB" b="1" dirty="0"/>
+              <a:t>Aggregated relevance: </a:t>
+            </a:r>
+            <a:r>
               <a:rPr lang="en-GB" dirty="0"/>
-              <a:t>Aggregated relevance: keyword set → metadata; captures collective semantic alignment.</a:t>
+              <a:t>keyword set → metadata; captures collective semantic alignment.</a:t>
             </a:r>
           </a:p>
           <a:p>
@@ -11453,8 +11596,12 @@
               <a:defRPr sz="2000"/>
             </a:pPr>
             <a:r>
+              <a:rPr lang="en-GB" b="1" dirty="0"/>
+              <a:t>Average keyword-level relevance: </a:t>
+            </a:r>
+            <a:r>
               <a:rPr lang="en-GB" dirty="0"/>
-              <a:t>Average keyword-level relevance: individual keyword → metadata; captures alignment of individual keywords.</a:t>
+              <a:t>individual keyword → metadata; captures alignment of individual keywords.</a:t>
             </a:r>
           </a:p>
         </p:txBody>
@@ -11473,7 +11620,7 @@
         </p:nvSpPr>
         <p:spPr>
           <a:xfrm>
-            <a:off x="936522" y="1162482"/>
+            <a:off x="936522" y="914114"/>
             <a:ext cx="10127226" cy="523220"/>
           </a:xfrm>
           <a:prstGeom prst="rect">
@@ -11867,7 +12014,7 @@
         <p:spPr>
           <a:xfrm>
             <a:off x="914060" y="1504641"/>
-            <a:ext cx="10515600" cy="2697355"/>
+            <a:ext cx="10515600" cy="2141895"/>
           </a:xfrm>
         </p:spPr>
         <p:txBody>
@@ -11967,29 +12114,6 @@
             <a:r>
               <a:rPr lang="en-GB" sz="2000" dirty="0"/>
               <a:t>, where 𝑀𝑑 consist of the dataset title or description. </a:t>
-            </a:r>
-          </a:p>
-          <a:p>
-            <a:pPr algn="just"/>
-            <a:r>
-              <a:rPr lang="en-GB" sz="2000" dirty="0"/>
-              <a:t>Let 𝑓 (⋅) denote the </a:t>
-            </a:r>
-            <a:r>
-              <a:rPr lang="en-GB" sz="2000" i="1" dirty="0"/>
-              <a:t>embedding function</a:t>
-            </a:r>
-            <a:r>
-              <a:rPr lang="en-GB" sz="2000" dirty="0"/>
-              <a:t>, and 𝑔(⋅) denote </a:t>
-            </a:r>
-            <a:r>
-              <a:rPr lang="en-GB" sz="2000" i="1" dirty="0"/>
-              <a:t>an aggregation function </a:t>
-            </a:r>
-            <a:r>
-              <a:rPr lang="en-GB" sz="2000" dirty="0"/>
-              <a:t>combining the semantic representations of all keywords into a collective representation.</a:t>
             </a:r>
           </a:p>
           <a:p>
@@ -12059,7 +12183,7 @@
         </p:nvSpPr>
         <p:spPr>
           <a:xfrm>
-            <a:off x="3097163" y="4664419"/>
+            <a:off x="3037807" y="3962204"/>
             <a:ext cx="7499554" cy="461665"/>
           </a:xfrm>
           <a:prstGeom prst="rect">
@@ -12185,69 +12309,6 @@
           </a:p>
         </p:txBody>
       </p:sp>
-      <p:sp>
-        <p:nvSpPr>
-          <p:cNvPr id="6" name="Speech Bubble: Oval 5">
-            <a:extLst>
-              <a:ext uri="{FF2B5EF4-FFF2-40B4-BE49-F238E27FC236}">
-                <a16:creationId xmlns:a16="http://schemas.microsoft.com/office/drawing/2014/main" id="{C3CC0D91-F1C1-5C48-7178-47F302320551}"/>
-              </a:ext>
-            </a:extLst>
-          </p:cNvPr>
-          <p:cNvSpPr/>
-          <p:nvPr/>
-        </p:nvSpPr>
-        <p:spPr bwMode="auto">
-          <a:xfrm>
-            <a:off x="6931742" y="3817585"/>
-            <a:ext cx="3664975" cy="675785"/>
-          </a:xfrm>
-          <a:prstGeom prst="wedgeEllipseCallout">
-            <a:avLst>
-              <a:gd name="adj1" fmla="val -91764"/>
-              <a:gd name="adj2" fmla="val 89650"/>
-            </a:avLst>
-          </a:prstGeom>
-          <a:solidFill>
-            <a:schemeClr val="bg1"/>
-          </a:solidFill>
-          <a:ln>
-            <a:solidFill>
-              <a:srgbClr val="92D050"/>
-            </a:solidFill>
-          </a:ln>
-        </p:spPr>
-        <p:style>
-          <a:lnRef idx="2">
-            <a:schemeClr val="accent1">
-              <a:shade val="50000"/>
-            </a:schemeClr>
-          </a:lnRef>
-          <a:fillRef idx="1">
-            <a:schemeClr val="accent1"/>
-          </a:fillRef>
-          <a:effectRef idx="0">
-            <a:schemeClr val="accent1"/>
-          </a:effectRef>
-          <a:fontRef idx="minor">
-            <a:schemeClr val="lt1"/>
-          </a:fontRef>
-        </p:style>
-        <p:txBody>
-          <a:bodyPr rtlCol="0" anchor="ctr"/>
-          <a:lstStyle/>
-          <a:p>
-            <a:r>
-              <a:rPr lang="en-US" sz="1600" dirty="0">
-                <a:solidFill>
-                  <a:srgbClr val="0070C0"/>
-                </a:solidFill>
-              </a:rPr>
-              <a:t>Cos (.,.) , cosine similarity</a:t>
-            </a:r>
-          </a:p>
-        </p:txBody>
-      </p:sp>
       <p:pic>
         <p:nvPicPr>
           <p:cNvPr id="8" name="Picture 7">
@@ -12276,7 +12337,7 @@
         </p:blipFill>
         <p:spPr>
           <a:xfrm>
-            <a:off x="6931742" y="5297133"/>
+            <a:off x="6862947" y="4682566"/>
             <a:ext cx="3710500" cy="896451"/>
           </a:xfrm>
           <a:prstGeom prst="rect">
@@ -12298,7 +12359,7 @@
         </p:nvSpPr>
         <p:spPr>
           <a:xfrm rot="18737194">
-            <a:off x="6195386" y="4998035"/>
+            <a:off x="6182755" y="4362834"/>
             <a:ext cx="413519" cy="1001371"/>
           </a:xfrm>
           <a:prstGeom prst="downArrow">
@@ -12594,7 +12655,7 @@
                             </p:stCondLst>
                             <p:childTnLst>
                               <p:par>
-                                <p:cTn id="17" presetID="1" presetClass="entr" presetSubtype="0" fill="hold" nodeType="clickEffect">
+                                <p:cTn id="17" presetID="1" presetClass="entr" presetSubtype="0" fill="hold" grpId="0" nodeType="clickEffect">
                                   <p:stCondLst>
                                     <p:cond delay="0"/>
                                   </p:stCondLst>
@@ -12607,11 +12668,7 @@
                                           </p:stCondLst>
                                         </p:cTn>
                                         <p:tgtEl>
-                                          <p:spTgt spid="3">
-                                            <p:txEl>
-                                              <p:pRg st="3" end="3"/>
-                                            </p:txEl>
-                                          </p:spTgt>
+                                          <p:spTgt spid="5"/>
                                         </p:tgtEl>
                                         <p:attrNameLst>
                                           <p:attrName>style.visibility</p:attrName>
@@ -12656,96 +12713,6 @@
                                           </p:stCondLst>
                                         </p:cTn>
                                         <p:tgtEl>
-                                          <p:spTgt spid="5"/>
-                                        </p:tgtEl>
-                                        <p:attrNameLst>
-                                          <p:attrName>style.visibility</p:attrName>
-                                        </p:attrNameLst>
-                                      </p:cBhvr>
-                                      <p:to>
-                                        <p:strVal val="visible"/>
-                                      </p:to>
-                                    </p:set>
-                                  </p:childTnLst>
-                                </p:cTn>
-                              </p:par>
-                            </p:childTnLst>
-                          </p:cTn>
-                        </p:par>
-                      </p:childTnLst>
-                    </p:cTn>
-                  </p:par>
-                  <p:par>
-                    <p:cTn id="23" fill="hold">
-                      <p:stCondLst>
-                        <p:cond delay="indefinite"/>
-                      </p:stCondLst>
-                      <p:childTnLst>
-                        <p:par>
-                          <p:cTn id="24" fill="hold">
-                            <p:stCondLst>
-                              <p:cond delay="0"/>
-                            </p:stCondLst>
-                            <p:childTnLst>
-                              <p:par>
-                                <p:cTn id="25" presetID="1" presetClass="entr" presetSubtype="0" fill="hold" grpId="0" nodeType="clickEffect">
-                                  <p:stCondLst>
-                                    <p:cond delay="0"/>
-                                  </p:stCondLst>
-                                  <p:childTnLst>
-                                    <p:set>
-                                      <p:cBhvr>
-                                        <p:cTn id="26" dur="1" fill="hold">
-                                          <p:stCondLst>
-                                            <p:cond delay="0"/>
-                                          </p:stCondLst>
-                                        </p:cTn>
-                                        <p:tgtEl>
-                                          <p:spTgt spid="6"/>
-                                        </p:tgtEl>
-                                        <p:attrNameLst>
-                                          <p:attrName>style.visibility</p:attrName>
-                                        </p:attrNameLst>
-                                      </p:cBhvr>
-                                      <p:to>
-                                        <p:strVal val="visible"/>
-                                      </p:to>
-                                    </p:set>
-                                  </p:childTnLst>
-                                </p:cTn>
-                              </p:par>
-                            </p:childTnLst>
-                          </p:cTn>
-                        </p:par>
-                      </p:childTnLst>
-                    </p:cTn>
-                  </p:par>
-                  <p:par>
-                    <p:cTn id="27" fill="hold">
-                      <p:stCondLst>
-                        <p:cond delay="indefinite"/>
-                      </p:stCondLst>
-                      <p:childTnLst>
-                        <p:par>
-                          <p:cTn id="28" fill="hold">
-                            <p:stCondLst>
-                              <p:cond delay="0"/>
-                            </p:stCondLst>
-                            <p:childTnLst>
-                              <p:par>
-                                <p:cTn id="29" presetID="1" presetClass="entr" presetSubtype="0" fill="hold" grpId="0" nodeType="clickEffect">
-                                  <p:stCondLst>
-                                    <p:cond delay="0"/>
-                                  </p:stCondLst>
-                                  <p:childTnLst>
-                                    <p:set>
-                                      <p:cBhvr>
-                                        <p:cTn id="30" dur="1" fill="hold">
-                                          <p:stCondLst>
-                                            <p:cond delay="0"/>
-                                          </p:stCondLst>
-                                        </p:cTn>
-                                        <p:tgtEl>
                                           <p:spTgt spid="9"/>
                                         </p:tgtEl>
                                         <p:attrNameLst>
@@ -12760,14 +12727,14 @@
                                 </p:cTn>
                               </p:par>
                               <p:par>
-                                <p:cTn id="31" presetID="1" presetClass="entr" presetSubtype="0" fill="hold" nodeType="withEffect">
+                                <p:cTn id="23" presetID="1" presetClass="entr" presetSubtype="0" fill="hold" nodeType="withEffect">
                                   <p:stCondLst>
                                     <p:cond delay="0"/>
                                   </p:stCondLst>
                                   <p:childTnLst>
                                     <p:set>
                                       <p:cBhvr>
-                                        <p:cTn id="32" dur="1" fill="hold">
+                                        <p:cTn id="24" dur="1" fill="hold">
                                           <p:stCondLst>
                                             <p:cond delay="0"/>
                                           </p:stCondLst>
@@ -12815,7 +12782,6 @@
     </p:tnLst>
     <p:bldLst>
       <p:bldP spid="5" grpId="0"/>
-      <p:bldP spid="6" grpId="0" animBg="1"/>
       <p:bldP spid="9" grpId="0" animBg="1"/>
     </p:bldLst>
   </p:timing>
@@ -13620,15 +13586,7 @@
             </a:r>
             <a:r>
               <a:rPr lang="en-GB" sz="2000" dirty="0"/>
-              <a:t>} represent the associated descriptive metadata, where 𝑀</a:t>
-            </a:r>
-            <a:r>
-              <a:rPr lang="en-GB" sz="2000" baseline="-25000" dirty="0"/>
-              <a:t>𝑑</a:t>
-            </a:r>
-            <a:r>
-              <a:rPr lang="en-GB" sz="2000" dirty="0"/>
-              <a:t> is either the dataset title or description. </a:t>
+              <a:t>} represent the associated descriptive metadata.</a:t>
             </a:r>
           </a:p>
           <a:p>

--- a/slides/nxdg_2026_Deperias.pptx
+++ b/slides/nxdg_2026_Deperias.pptx
@@ -10,7 +10,7 @@
   <p:sldIdLst>
     <p:sldId id="256" r:id="rId2"/>
     <p:sldId id="257" r:id="rId3"/>
-    <p:sldId id="259" r:id="rId4"/>
+    <p:sldId id="274" r:id="rId4"/>
     <p:sldId id="258" r:id="rId5"/>
     <p:sldId id="260" r:id="rId6"/>
     <p:sldId id="261" r:id="rId7"/>
@@ -214,7 +214,7 @@
           <a:p>
             <a:fld id="{DB5D3ED2-8864-4DD6-A3F8-C2211C0978B4}" type="datetimeFigureOut">
               <a:rPr lang="en-BE" smtClean="0"/>
-              <a:t>09/09/2026</a:t>
+              <a:t>10/09/2026</a:t>
             </a:fld>
             <a:endParaRPr lang="en-BE" dirty="0"/>
           </a:p>
@@ -4461,7 +4461,7 @@
             </a:r>
             <a:r>
               <a:rPr lang="en-GB" sz="2000" dirty="0"/>
-              <a:t>Sensitivity: completeness thresholds τ ∈ {0.6, 0.7, 0.8}; alternative embedding model all-mpnet-base-v2.</a:t>
+              <a:t>Sensitivity: completeness thresholds τ ∈ {0.6, 0.7, 0.8}; alternative embedding model: all-mpnet-base-v2.</a:t>
             </a:r>
           </a:p>
         </p:txBody>
@@ -6903,7 +6903,7 @@
             </a:r>
             <a:r>
               <a:rPr lang="en-GB" sz="2800" b="1" i="1" dirty="0"/>
-              <a:t>Semantic Completeness versus Semantic Completeness</a:t>
+              <a:t>Semantic Relevance versus Semantic Completeness</a:t>
             </a:r>
             <a:endParaRPr lang="en-BE" sz="2800" b="1" dirty="0"/>
           </a:p>
@@ -8892,7 +8892,7 @@
         </p:nvSpPr>
         <p:spPr>
           <a:xfrm>
-            <a:off x="1005349" y="1908996"/>
+            <a:off x="1005349" y="1447649"/>
             <a:ext cx="10515600" cy="922694"/>
           </a:xfrm>
         </p:spPr>
@@ -8910,7 +8910,7 @@
             </a:pPr>
             <a:r>
               <a:rPr lang="en-GB" dirty="0"/>
-              <a:t>  Open data portals such as the European Open Data Portal contain increasingly large collections of datasets.</a:t>
+              <a:t>  Open data portals contain increasingly large collections of datasets.</a:t>
             </a:r>
           </a:p>
         </p:txBody>
@@ -9095,8 +9095,8 @@
         </p:nvSpPr>
         <p:spPr>
           <a:xfrm>
-            <a:off x="1005349" y="2831690"/>
-            <a:ext cx="10616380" cy="707886"/>
+            <a:off x="1005349" y="2370343"/>
+            <a:ext cx="10616380" cy="1272143"/>
           </a:xfrm>
           <a:prstGeom prst="rect">
             <a:avLst/>
@@ -9119,7 +9119,66 @@
             </a:pPr>
             <a:r>
               <a:rPr lang="en-GB" dirty="0"/>
-              <a:t>Data discovery usually through metadata and based on the </a:t>
+              <a:t>Data discovery usually through metadata.</a:t>
+            </a:r>
+          </a:p>
+          <a:p>
+            <a:pPr>
+              <a:spcAft>
+                <a:spcPts val="1000"/>
+              </a:spcAft>
+              <a:defRPr sz="2000"/>
+            </a:pPr>
+            <a:endParaRPr lang="en-GB" dirty="0"/>
+          </a:p>
+          <a:p>
+            <a:pPr marL="342900" indent="-342900">
+              <a:spcAft>
+                <a:spcPts val="1000"/>
+              </a:spcAft>
+              <a:buFont typeface="Arial" panose="020B0604020202020204" pitchFamily="34" charset="0"/>
+              <a:buChar char="•"/>
+              <a:defRPr sz="2000"/>
+            </a:pPr>
+            <a:endParaRPr lang="en-BE" dirty="0"/>
+          </a:p>
+        </p:txBody>
+      </p:sp>
+      <p:sp>
+        <p:nvSpPr>
+          <p:cNvPr id="11" name="TextBox 10">
+            <a:extLst>
+              <a:ext uri="{FF2B5EF4-FFF2-40B4-BE49-F238E27FC236}">
+                <a16:creationId xmlns:a16="http://schemas.microsoft.com/office/drawing/2014/main" id="{397CE1BA-4907-253B-8B09-E2094A24CC66}"/>
+              </a:ext>
+            </a:extLst>
+          </p:cNvPr>
+          <p:cNvSpPr txBox="1"/>
+          <p:nvPr/>
+        </p:nvSpPr>
+        <p:spPr>
+          <a:xfrm>
+            <a:off x="1005349" y="3244334"/>
+            <a:ext cx="8482780" cy="369332"/>
+          </a:xfrm>
+          <a:prstGeom prst="rect">
+            <a:avLst/>
+          </a:prstGeom>
+          <a:noFill/>
+        </p:spPr>
+        <p:txBody>
+          <a:bodyPr wrap="square">
+            <a:spAutoFit/>
+          </a:bodyPr>
+          <a:lstStyle/>
+          <a:p>
+            <a:pPr marL="285750" indent="-285750">
+              <a:buFont typeface="Arial" panose="020B0604020202020204" pitchFamily="34" charset="0"/>
+              <a:buChar char="•"/>
+            </a:pPr>
+            <a:r>
+              <a:rPr lang="en-GB" dirty="0"/>
+              <a:t> Data discoverability is based on the </a:t>
             </a:r>
             <a:r>
               <a:rPr lang="en-GB" b="1" i="1" dirty="0"/>
@@ -9213,7 +9272,7 @@
                             </p:stCondLst>
                             <p:childTnLst>
                               <p:par>
-                                <p:cTn id="9" presetID="1" presetClass="entr" presetSubtype="0" fill="hold" grpId="0" nodeType="clickEffect">
+                                <p:cTn id="9" presetID="1" presetClass="entr" presetSubtype="0" fill="hold" nodeType="clickEffect">
                                   <p:stCondLst>
                                     <p:cond delay="0"/>
                                   </p:stCondLst>
@@ -9226,7 +9285,7 @@
                                           </p:stCondLst>
                                         </p:cTn>
                                         <p:tgtEl>
-                                          <p:spTgt spid="8">
+                                          <p:spTgt spid="9">
                                             <p:txEl>
                                               <p:pRg st="0" end="0"/>
                                             </p:txEl>
@@ -9243,21 +9302,66 @@
                                   </p:childTnLst>
                                 </p:cTn>
                               </p:par>
+                            </p:childTnLst>
+                          </p:cTn>
+                        </p:par>
+                      </p:childTnLst>
+                    </p:cTn>
+                  </p:par>
+                  <p:par>
+                    <p:cTn id="11" fill="hold">
+                      <p:stCondLst>
+                        <p:cond delay="indefinite"/>
+                      </p:stCondLst>
+                      <p:childTnLst>
+                        <p:par>
+                          <p:cTn id="12" fill="hold">
+                            <p:stCondLst>
+                              <p:cond delay="0"/>
+                            </p:stCondLst>
+                            <p:childTnLst>
                               <p:par>
-                                <p:cTn id="11" presetID="1" presetClass="entr" presetSubtype="0" fill="hold" grpId="0" nodeType="withEffect">
+                                <p:cTn id="13" presetID="1" presetClass="entr" presetSubtype="0" fill="hold" grpId="0" nodeType="clickEffect">
                                   <p:stCondLst>
                                     <p:cond delay="0"/>
                                   </p:stCondLst>
                                   <p:childTnLst>
                                     <p:set>
                                       <p:cBhvr>
-                                        <p:cTn id="12" dur="1" fill="hold">
+                                        <p:cTn id="14" dur="1" fill="hold">
                                           <p:stCondLst>
                                             <p:cond delay="0"/>
                                           </p:stCondLst>
                                         </p:cTn>
                                         <p:tgtEl>
-                                          <p:spTgt spid="9"/>
+                                          <p:spTgt spid="11"/>
+                                        </p:tgtEl>
+                                        <p:attrNameLst>
+                                          <p:attrName>style.visibility</p:attrName>
+                                        </p:attrNameLst>
+                                      </p:cBhvr>
+                                      <p:to>
+                                        <p:strVal val="visible"/>
+                                      </p:to>
+                                    </p:set>
+                                  </p:childTnLst>
+                                </p:cTn>
+                              </p:par>
+                              <p:par>
+                                <p:cTn id="15" presetID="1" presetClass="entr" presetSubtype="0" fill="hold" grpId="0" nodeType="withEffect">
+                                  <p:stCondLst>
+                                    <p:cond delay="0"/>
+                                  </p:stCondLst>
+                                  <p:childTnLst>
+                                    <p:set>
+                                      <p:cBhvr>
+                                        <p:cTn id="16" dur="1" fill="hold">
+                                          <p:stCondLst>
+                                            <p:cond delay="0"/>
+                                          </p:stCondLst>
+                                        </p:cTn>
+                                        <p:tgtEl>
+                                          <p:spTgt spid="8"/>
                                         </p:tgtEl>
                                         <p:attrNameLst>
                                           <p:attrName>style.visibility</p:attrName>
@@ -9298,8 +9402,8 @@
       </p:par>
     </p:tnLst>
     <p:bldLst>
-      <p:bldP spid="8" grpId="0" build="allAtOnce"/>
-      <p:bldP spid="9" grpId="0"/>
+      <p:bldP spid="8" grpId="0"/>
+      <p:bldP spid="11" grpId="0"/>
     </p:bldLst>
   </p:timing>
 </p:sld>
@@ -9313,7 +9417,7 @@
         <p:cNvPr id="1" name="">
           <a:extLst>
             <a:ext uri="{FF2B5EF4-FFF2-40B4-BE49-F238E27FC236}">
-              <a16:creationId xmlns:a16="http://schemas.microsoft.com/office/drawing/2014/main" id="{FC9B1335-A20E-49BA-E22F-5AA52D98E07D}"/>
+              <a16:creationId xmlns:a16="http://schemas.microsoft.com/office/drawing/2014/main" id="{A271C16C-BF62-5F3A-AA42-7B66FA94EBF6}"/>
             </a:ext>
           </a:extLst>
         </p:cNvPr>
@@ -9330,49 +9434,10 @@
       </p:grpSpPr>
       <p:sp>
         <p:nvSpPr>
-          <p:cNvPr id="3" name="Content Placeholder 2">
-            <a:extLst>
-              <a:ext uri="{FF2B5EF4-FFF2-40B4-BE49-F238E27FC236}">
-                <a16:creationId xmlns:a16="http://schemas.microsoft.com/office/drawing/2014/main" id="{85424A8D-A02E-08F6-5BD0-AB9D681E538D}"/>
-              </a:ext>
-            </a:extLst>
-          </p:cNvPr>
-          <p:cNvSpPr>
-            <a:spLocks noGrp="1"/>
-          </p:cNvSpPr>
-          <p:nvPr>
-            <p:ph idx="1"/>
-          </p:nvPr>
-        </p:nvSpPr>
-        <p:spPr>
-          <a:xfrm>
-            <a:off x="1005349" y="1908996"/>
-            <a:ext cx="10515600" cy="2171391"/>
-          </a:xfrm>
-        </p:spPr>
-        <p:txBody>
-          <a:bodyPr>
-            <a:normAutofit/>
-          </a:bodyPr>
-          <a:lstStyle/>
-          <a:p>
-            <a:r>
-              <a:rPr lang="en-GB" sz="2000" b="1" i="1" dirty="0"/>
-              <a:t>  Metadata-driven dataset discovery in open data portals: </a:t>
-            </a:r>
-            <a:r>
-              <a:rPr lang="en-GB" sz="2000" dirty="0"/>
-              <a:t>Datasets typically discovered through metadata rather than direct access to their contents.</a:t>
-            </a:r>
-          </a:p>
-        </p:txBody>
-      </p:sp>
-      <p:sp>
-        <p:nvSpPr>
           <p:cNvPr id="4" name="TextBox 3">
             <a:extLst>
               <a:ext uri="{FF2B5EF4-FFF2-40B4-BE49-F238E27FC236}">
-                <a16:creationId xmlns:a16="http://schemas.microsoft.com/office/drawing/2014/main" id="{05AAA621-6C52-934E-15A3-54858DCE07A1}"/>
+                <a16:creationId xmlns:a16="http://schemas.microsoft.com/office/drawing/2014/main" id="{BDDBAA5D-F3A6-13BF-3C9E-C58203927695}"/>
               </a:ext>
             </a:extLst>
           </p:cNvPr>
@@ -9416,7 +9481,7 @@
           <p:cNvPr id="5" name="Date Placeholder 4">
             <a:extLst>
               <a:ext uri="{FF2B5EF4-FFF2-40B4-BE49-F238E27FC236}">
-                <a16:creationId xmlns:a16="http://schemas.microsoft.com/office/drawing/2014/main" id="{2CE749AD-D9E9-58FF-7F87-A7DFF8D7FEA5}"/>
+                <a16:creationId xmlns:a16="http://schemas.microsoft.com/office/drawing/2014/main" id="{B5A16750-6C93-8FB8-FAE1-5173723B13E8}"/>
               </a:ext>
             </a:extLst>
           </p:cNvPr>
@@ -9444,7 +9509,7 @@
           <p:cNvPr id="6" name="Slide Number Placeholder 5">
             <a:extLst>
               <a:ext uri="{FF2B5EF4-FFF2-40B4-BE49-F238E27FC236}">
-                <a16:creationId xmlns:a16="http://schemas.microsoft.com/office/drawing/2014/main" id="{87D147F6-7617-A884-8911-AEAEEA96B2D2}"/>
+                <a16:creationId xmlns:a16="http://schemas.microsoft.com/office/drawing/2014/main" id="{1ABB0C25-B35C-34EF-0C2E-7F131E01ACE0}"/>
               </a:ext>
             </a:extLst>
           </p:cNvPr>
@@ -9473,7 +9538,7 @@
           <p:cNvPr id="7" name="Footer Placeholder 6">
             <a:extLst>
               <a:ext uri="{FF2B5EF4-FFF2-40B4-BE49-F238E27FC236}">
-                <a16:creationId xmlns:a16="http://schemas.microsoft.com/office/drawing/2014/main" id="{38F22D52-96CD-9FE7-07E7-6AA3FCCEE66F}"/>
+                <a16:creationId xmlns:a16="http://schemas.microsoft.com/office/drawing/2014/main" id="{C2510ABB-CB21-A2DF-216E-4904838296C7}"/>
               </a:ext>
             </a:extLst>
           </p:cNvPr>
@@ -9502,7 +9567,7 @@
           <p:cNvPr id="8" name="TextBox 7">
             <a:extLst>
               <a:ext uri="{FF2B5EF4-FFF2-40B4-BE49-F238E27FC236}">
-                <a16:creationId xmlns:a16="http://schemas.microsoft.com/office/drawing/2014/main" id="{C3605477-941C-2283-721F-EDB4F4948587}"/>
+                <a16:creationId xmlns:a16="http://schemas.microsoft.com/office/drawing/2014/main" id="{15D8CBA8-BF46-6D0A-BCAF-C4828A75CDBA}"/>
               </a:ext>
             </a:extLst>
           </p:cNvPr>
@@ -9511,7 +9576,7 @@
         </p:nvSpPr>
         <p:spPr>
           <a:xfrm>
-            <a:off x="374855" y="5833130"/>
+            <a:off x="347817" y="5935310"/>
             <a:ext cx="11442290" cy="523220"/>
           </a:xfrm>
           <a:prstGeom prst="rect">
@@ -9533,99 +9598,190 @@
           </a:p>
         </p:txBody>
       </p:sp>
-      <p:sp>
-        <p:nvSpPr>
-          <p:cNvPr id="9" name="TextBox 8">
-            <a:extLst>
-              <a:ext uri="{FF2B5EF4-FFF2-40B4-BE49-F238E27FC236}">
-                <a16:creationId xmlns:a16="http://schemas.microsoft.com/office/drawing/2014/main" id="{D20B2068-FC6B-1F84-6B23-D6759FEE7DFC}"/>
-              </a:ext>
-            </a:extLst>
-          </p:cNvPr>
-          <p:cNvSpPr txBox="1"/>
+      <p:pic>
+        <p:nvPicPr>
+          <p:cNvPr id="13" name="Picture 12">
+            <a:extLst>
+              <a:ext uri="{FF2B5EF4-FFF2-40B4-BE49-F238E27FC236}">
+                <a16:creationId xmlns:a16="http://schemas.microsoft.com/office/drawing/2014/main" id="{60A56B62-5C5B-8BA5-2CDC-A69A32AF08FF}"/>
+              </a:ext>
+            </a:extLst>
+          </p:cNvPr>
+          <p:cNvPicPr>
+            <a:picLocks noChangeAspect="1"/>
+          </p:cNvPicPr>
           <p:nvPr/>
-        </p:nvSpPr>
+        </p:nvPicPr>
+        <p:blipFill>
+          <a:blip r:embed="rId2">
+            <a:extLst>
+              <a:ext uri="{28A0092B-C50C-407E-A947-70E740481C1C}">
+                <a14:useLocalDpi xmlns:a14="http://schemas.microsoft.com/office/drawing/2010/main" val="0"/>
+              </a:ext>
+            </a:extLst>
+          </a:blip>
+          <a:stretch>
+            <a:fillRect/>
+          </a:stretch>
+        </p:blipFill>
         <p:spPr>
           <a:xfrm>
-            <a:off x="1005349" y="3029872"/>
-            <a:ext cx="10127226" cy="707886"/>
+            <a:off x="838200" y="1354874"/>
+            <a:ext cx="6223000" cy="2940857"/>
           </a:xfrm>
           <a:prstGeom prst="rect">
             <a:avLst/>
           </a:prstGeom>
-          <a:noFill/>
         </p:spPr>
-        <p:txBody>
-          <a:bodyPr wrap="square" rtlCol="0">
-            <a:spAutoFit/>
-          </a:bodyPr>
-          <a:lstStyle/>
-          <a:p>
-            <a:pPr marL="342900" indent="-342900">
-              <a:buFont typeface="Arial" panose="020B0604020202020204" pitchFamily="34" charset="0"/>
-              <a:buChar char="•"/>
-            </a:pPr>
-            <a:r>
-              <a:rPr lang="en-GB" sz="2000" b="1" i="1" dirty="0"/>
-              <a:t>Keywords as Thematic Descriptors: </a:t>
-            </a:r>
-            <a:r>
-              <a:rPr lang="en-GB" sz="2000" dirty="0"/>
-              <a:t>“Documents are linked thematically with each other when they have been indexed with the same tags” [2]. </a:t>
-            </a:r>
-          </a:p>
-        </p:txBody>
-      </p:sp>
-      <p:sp>
-        <p:nvSpPr>
-          <p:cNvPr id="12" name="TextBox 11">
-            <a:extLst>
-              <a:ext uri="{FF2B5EF4-FFF2-40B4-BE49-F238E27FC236}">
-                <a16:creationId xmlns:a16="http://schemas.microsoft.com/office/drawing/2014/main" id="{F5F0404C-1ADB-E757-A343-1FA5CBF099A1}"/>
-              </a:ext>
-            </a:extLst>
-          </p:cNvPr>
-          <p:cNvSpPr txBox="1"/>
+      </p:pic>
+      <p:pic>
+        <p:nvPicPr>
+          <p:cNvPr id="15" name="Picture 14">
+            <a:extLst>
+              <a:ext uri="{FF2B5EF4-FFF2-40B4-BE49-F238E27FC236}">
+                <a16:creationId xmlns:a16="http://schemas.microsoft.com/office/drawing/2014/main" id="{11DAD4E3-079A-0FB8-CF4C-E1CD830AF7E2}"/>
+              </a:ext>
+            </a:extLst>
+          </p:cNvPr>
+          <p:cNvPicPr>
+            <a:picLocks noChangeAspect="1"/>
+          </p:cNvPicPr>
           <p:nvPr/>
-        </p:nvSpPr>
+        </p:nvPicPr>
+        <p:blipFill>
+          <a:blip r:embed="rId3">
+            <a:extLst>
+              <a:ext uri="{28A0092B-C50C-407E-A947-70E740481C1C}">
+                <a14:useLocalDpi xmlns:a14="http://schemas.microsoft.com/office/drawing/2010/main" val="0"/>
+              </a:ext>
+            </a:extLst>
+          </a:blip>
+          <a:stretch>
+            <a:fillRect/>
+          </a:stretch>
+        </p:blipFill>
         <p:spPr>
           <a:xfrm>
-            <a:off x="1005349" y="3901833"/>
-            <a:ext cx="10616380" cy="1113125"/>
+            <a:off x="7061200" y="1377622"/>
+            <a:ext cx="4778154" cy="2758679"/>
           </a:xfrm>
           <a:prstGeom prst="rect">
             <a:avLst/>
           </a:prstGeom>
-          <a:noFill/>
         </p:spPr>
-        <p:txBody>
-          <a:bodyPr wrap="square" rtlCol="0">
-            <a:spAutoFit/>
-          </a:bodyPr>
-          <a:lstStyle/>
-          <a:p>
-            <a:pPr marL="342900" indent="-342900">
-              <a:spcAft>
-                <a:spcPts val="1000"/>
-              </a:spcAft>
-              <a:buFont typeface="Arial" panose="020B0604020202020204" pitchFamily="34" charset="0"/>
-              <a:buChar char="•"/>
-              <a:defRPr sz="2000"/>
-            </a:pPr>
-            <a:r>
-              <a:rPr lang="en-GB" dirty="0"/>
-              <a:t>Keywords support metadata search yet the quality of keywords in relation to the descriptive metadata is unexplored. </a:t>
-            </a:r>
-          </a:p>
-          <a:p>
-            <a:endParaRPr lang="en-BE" dirty="0"/>
-          </a:p>
-        </p:txBody>
-      </p:sp>
+      </p:pic>
+      <p:pic>
+        <p:nvPicPr>
+          <p:cNvPr id="17" name="Picture 16">
+            <a:extLst>
+              <a:ext uri="{FF2B5EF4-FFF2-40B4-BE49-F238E27FC236}">
+                <a16:creationId xmlns:a16="http://schemas.microsoft.com/office/drawing/2014/main" id="{C708A7AB-C42B-EFF9-69B6-98EF78C1C452}"/>
+              </a:ext>
+            </a:extLst>
+          </p:cNvPr>
+          <p:cNvPicPr>
+            <a:picLocks noChangeAspect="1"/>
+          </p:cNvPicPr>
+          <p:nvPr/>
+        </p:nvPicPr>
+        <p:blipFill>
+          <a:blip r:embed="rId4">
+            <a:extLst>
+              <a:ext uri="{28A0092B-C50C-407E-A947-70E740481C1C}">
+                <a14:useLocalDpi xmlns:a14="http://schemas.microsoft.com/office/drawing/2010/main" val="0"/>
+              </a:ext>
+            </a:extLst>
+          </a:blip>
+          <a:stretch>
+            <a:fillRect/>
+          </a:stretch>
+        </p:blipFill>
+        <p:spPr>
+          <a:xfrm>
+            <a:off x="838200" y="4494870"/>
+            <a:ext cx="3551228" cy="1371719"/>
+          </a:xfrm>
+          <a:prstGeom prst="rect">
+            <a:avLst/>
+          </a:prstGeom>
+        </p:spPr>
+      </p:pic>
+      <p:pic>
+        <p:nvPicPr>
+          <p:cNvPr id="19" name="Picture 18">
+            <a:extLst>
+              <a:ext uri="{FF2B5EF4-FFF2-40B4-BE49-F238E27FC236}">
+                <a16:creationId xmlns:a16="http://schemas.microsoft.com/office/drawing/2014/main" id="{37B4C09A-AED4-68C1-B900-C0495943CE7F}"/>
+              </a:ext>
+            </a:extLst>
+          </p:cNvPr>
+          <p:cNvPicPr>
+            <a:picLocks noChangeAspect="1"/>
+          </p:cNvPicPr>
+          <p:nvPr/>
+        </p:nvPicPr>
+        <p:blipFill>
+          <a:blip r:embed="rId5">
+            <a:extLst>
+              <a:ext uri="{28A0092B-C50C-407E-A947-70E740481C1C}">
+                <a14:useLocalDpi xmlns:a14="http://schemas.microsoft.com/office/drawing/2010/main" val="0"/>
+              </a:ext>
+            </a:extLst>
+          </a:blip>
+          <a:stretch>
+            <a:fillRect/>
+          </a:stretch>
+        </p:blipFill>
+        <p:spPr>
+          <a:xfrm>
+            <a:off x="4543887" y="4494870"/>
+            <a:ext cx="3977985" cy="1341236"/>
+          </a:xfrm>
+          <a:prstGeom prst="rect">
+            <a:avLst/>
+          </a:prstGeom>
+        </p:spPr>
+      </p:pic>
+      <p:pic>
+        <p:nvPicPr>
+          <p:cNvPr id="21" name="Picture 20">
+            <a:extLst>
+              <a:ext uri="{FF2B5EF4-FFF2-40B4-BE49-F238E27FC236}">
+                <a16:creationId xmlns:a16="http://schemas.microsoft.com/office/drawing/2014/main" id="{301DB408-1A22-A7D7-DA76-D42590BE944E}"/>
+              </a:ext>
+            </a:extLst>
+          </p:cNvPr>
+          <p:cNvPicPr>
+            <a:picLocks noChangeAspect="1"/>
+          </p:cNvPicPr>
+          <p:nvPr/>
+        </p:nvPicPr>
+        <p:blipFill>
+          <a:blip r:embed="rId6">
+            <a:extLst>
+              <a:ext uri="{28A0092B-C50C-407E-A947-70E740481C1C}">
+                <a14:useLocalDpi xmlns:a14="http://schemas.microsoft.com/office/drawing/2010/main" val="0"/>
+              </a:ext>
+            </a:extLst>
+          </a:blip>
+          <a:stretch>
+            <a:fillRect/>
+          </a:stretch>
+        </p:blipFill>
+        <p:spPr>
+          <a:xfrm>
+            <a:off x="8610600" y="4491059"/>
+            <a:ext cx="3482642" cy="1348857"/>
+          </a:xfrm>
+          <a:prstGeom prst="rect">
+            <a:avLst/>
+          </a:prstGeom>
+        </p:spPr>
+      </p:pic>
     </p:spTree>
     <p:extLst>
       <p:ext uri="{BB962C8B-B14F-4D97-AF65-F5344CB8AC3E}">
-        <p14:creationId xmlns:p14="http://schemas.microsoft.com/office/powerpoint/2010/main" val="2932923634"/>
+        <p14:creationId xmlns:p14="http://schemas.microsoft.com/office/powerpoint/2010/main" val="3750623589"/>
       </p:ext>
     </p:extLst>
   </p:cSld>
@@ -9666,11 +9822,61 @@
                                           </p:stCondLst>
                                         </p:cTn>
                                         <p:tgtEl>
-                                          <p:spTgt spid="3">
-                                            <p:txEl>
-                                              <p:pRg st="0" end="0"/>
-                                            </p:txEl>
-                                          </p:spTgt>
+                                          <p:spTgt spid="13"/>
+                                        </p:tgtEl>
+                                        <p:attrNameLst>
+                                          <p:attrName>style.visibility</p:attrName>
+                                        </p:attrNameLst>
+                                      </p:cBhvr>
+                                      <p:to>
+                                        <p:strVal val="visible"/>
+                                      </p:to>
+                                    </p:set>
+                                  </p:childTnLst>
+                                </p:cTn>
+                              </p:par>
+                              <p:par>
+                                <p:cTn id="7" presetID="1" presetClass="entr" presetSubtype="0" fill="hold" nodeType="withEffect">
+                                  <p:stCondLst>
+                                    <p:cond delay="0"/>
+                                  </p:stCondLst>
+                                  <p:childTnLst>
+                                    <p:set>
+                                      <p:cBhvr>
+                                        <p:cTn id="8" dur="1" fill="hold">
+                                          <p:stCondLst>
+                                            <p:cond delay="0"/>
+                                          </p:stCondLst>
+                                        </p:cTn>
+                                        <p:tgtEl>
+                                          <p:spTgt spid="15"/>
+                                        </p:tgtEl>
+                                        <p:attrNameLst>
+                                          <p:attrName>style.visibility</p:attrName>
+                                        </p:attrNameLst>
+                                      </p:cBhvr>
+                                      <p:to>
+                                        <p:strVal val="visible"/>
+                                      </p:to>
+                                    </p:set>
+                                  </p:childTnLst>
+                                </p:cTn>
+                              </p:par>
+                              <p:par>
+                                <p:cTn id="9" presetID="1" presetClass="entr" presetSubtype="0" fill="hold" nodeType="withEffect">
+                                  <p:stCondLst>
+                                    <p:cond delay="0"/>
+                                  </p:stCondLst>
+                                  <p:childTnLst>
+                                    <p:set>
+                                      <p:cBhvr>
+                                        <p:cTn id="10" dur="1" fill="hold">
+                                          <p:stCondLst>
+                                            <p:cond delay="0"/>
+                                          </p:stCondLst>
+                                        </p:cTn>
+                                        <p:tgtEl>
+                                          <p:spTgt spid="17"/>
                                         </p:tgtEl>
                                         <p:attrNameLst>
                                           <p:attrName>style.visibility</p:attrName>
@@ -9690,32 +9896,32 @@
                     </p:cTn>
                   </p:par>
                   <p:par>
-                    <p:cTn id="7" fill="hold">
+                    <p:cTn id="11" fill="hold">
                       <p:stCondLst>
                         <p:cond delay="indefinite"/>
                       </p:stCondLst>
                       <p:childTnLst>
                         <p:par>
-                          <p:cTn id="8" fill="hold">
+                          <p:cTn id="12" fill="hold">
                             <p:stCondLst>
                               <p:cond delay="0"/>
                             </p:stCondLst>
                             <p:childTnLst>
                               <p:par>
-                                <p:cTn id="9" presetID="1" presetClass="entr" presetSubtype="0" fill="hold" grpId="0" nodeType="clickEffect">
+                                <p:cTn id="13" presetID="1" presetClass="entr" presetSubtype="0" fill="hold" nodeType="clickEffect">
                                   <p:stCondLst>
                                     <p:cond delay="0"/>
                                   </p:stCondLst>
                                   <p:childTnLst>
                                     <p:set>
                                       <p:cBhvr>
-                                        <p:cTn id="10" dur="1" fill="hold">
+                                        <p:cTn id="14" dur="1" fill="hold">
                                           <p:stCondLst>
                                             <p:cond delay="0"/>
                                           </p:stCondLst>
                                         </p:cTn>
                                         <p:tgtEl>
-                                          <p:spTgt spid="9"/>
+                                          <p:spTgt spid="19"/>
                                         </p:tgtEl>
                                         <p:attrNameLst>
                                           <p:attrName>style.visibility</p:attrName>
@@ -9729,24 +9935,20 @@
                                 </p:cTn>
                               </p:par>
                               <p:par>
-                                <p:cTn id="11" presetID="1" presetClass="entr" presetSubtype="0" fill="hold" grpId="0" nodeType="withEffect">
+                                <p:cTn id="15" presetID="1" presetClass="entr" presetSubtype="0" fill="hold" grpId="0" nodeType="withEffect">
                                   <p:stCondLst>
                                     <p:cond delay="0"/>
                                   </p:stCondLst>
                                   <p:childTnLst>
                                     <p:set>
                                       <p:cBhvr>
-                                        <p:cTn id="12" dur="1" fill="hold">
+                                        <p:cTn id="16" dur="1" fill="hold">
                                           <p:stCondLst>
                                             <p:cond delay="0"/>
                                           </p:stCondLst>
                                         </p:cTn>
                                         <p:tgtEl>
-                                          <p:spTgt spid="8">
-                                            <p:txEl>
-                                              <p:pRg st="0" end="0"/>
-                                            </p:txEl>
-                                          </p:spTgt>
+                                          <p:spTgt spid="8"/>
                                         </p:tgtEl>
                                         <p:attrNameLst>
                                           <p:attrName>style.visibility</p:attrName>
@@ -9766,36 +9968,32 @@
                     </p:cTn>
                   </p:par>
                   <p:par>
-                    <p:cTn id="13" fill="hold">
+                    <p:cTn id="17" fill="hold">
                       <p:stCondLst>
                         <p:cond delay="indefinite"/>
                       </p:stCondLst>
                       <p:childTnLst>
                         <p:par>
-                          <p:cTn id="14" fill="hold">
+                          <p:cTn id="18" fill="hold">
                             <p:stCondLst>
                               <p:cond delay="0"/>
                             </p:stCondLst>
                             <p:childTnLst>
                               <p:par>
-                                <p:cTn id="15" presetID="1" presetClass="entr" presetSubtype="0" fill="hold" nodeType="clickEffect">
+                                <p:cTn id="19" presetID="1" presetClass="entr" presetSubtype="0" fill="hold" nodeType="clickEffect">
                                   <p:stCondLst>
                                     <p:cond delay="0"/>
                                   </p:stCondLst>
                                   <p:childTnLst>
                                     <p:set>
                                       <p:cBhvr>
-                                        <p:cTn id="16" dur="1" fill="hold">
+                                        <p:cTn id="20" dur="1" fill="hold">
                                           <p:stCondLst>
                                             <p:cond delay="0"/>
                                           </p:stCondLst>
                                         </p:cTn>
                                         <p:tgtEl>
-                                          <p:spTgt spid="12">
-                                            <p:txEl>
-                                              <p:pRg st="0" end="0"/>
-                                            </p:txEl>
-                                          </p:spTgt>
+                                          <p:spTgt spid="21"/>
                                         </p:tgtEl>
                                         <p:attrNameLst>
                                           <p:attrName>style.visibility</p:attrName>
@@ -9836,8 +10034,7 @@
       </p:par>
     </p:tnLst>
     <p:bldLst>
-      <p:bldP spid="8" grpId="0" build="allAtOnce"/>
-      <p:bldP spid="9" grpId="0"/>
+      <p:bldP spid="8" grpId="0"/>
     </p:bldLst>
   </p:timing>
 </p:sld>
@@ -12183,7 +12380,7 @@
         </p:nvSpPr>
         <p:spPr>
           <a:xfrm>
-            <a:off x="3037807" y="3962204"/>
+            <a:off x="3047639" y="3573537"/>
             <a:ext cx="7499554" cy="461665"/>
           </a:xfrm>
           <a:prstGeom prst="rect">
@@ -12309,12 +12506,98 @@
           </a:p>
         </p:txBody>
       </p:sp>
+      <p:sp>
+        <p:nvSpPr>
+          <p:cNvPr id="13" name="Date Placeholder 12">
+            <a:extLst>
+              <a:ext uri="{FF2B5EF4-FFF2-40B4-BE49-F238E27FC236}">
+                <a16:creationId xmlns:a16="http://schemas.microsoft.com/office/drawing/2014/main" id="{6C1944AC-D1B6-3FC1-944D-3F555572145A}"/>
+              </a:ext>
+            </a:extLst>
+          </p:cNvPr>
+          <p:cNvSpPr>
+            <a:spLocks noGrp="1"/>
+          </p:cNvSpPr>
+          <p:nvPr>
+            <p:ph type="dt" sz="half" idx="10"/>
+          </p:nvPr>
+        </p:nvSpPr>
+        <p:spPr/>
+        <p:txBody>
+          <a:bodyPr/>
+          <a:lstStyle/>
+          <a:p>
+            <a:r>
+              <a:rPr lang="en-BE" b="1" dirty="0"/>
+              <a:t>15/09/2026</a:t>
+            </a:r>
+          </a:p>
+        </p:txBody>
+      </p:sp>
+      <p:sp>
+        <p:nvSpPr>
+          <p:cNvPr id="14" name="Slide Number Placeholder 13">
+            <a:extLst>
+              <a:ext uri="{FF2B5EF4-FFF2-40B4-BE49-F238E27FC236}">
+                <a16:creationId xmlns:a16="http://schemas.microsoft.com/office/drawing/2014/main" id="{45544BE0-844E-141D-CC14-0C291C9F27B6}"/>
+              </a:ext>
+            </a:extLst>
+          </p:cNvPr>
+          <p:cNvSpPr>
+            <a:spLocks noGrp="1"/>
+          </p:cNvSpPr>
+          <p:nvPr>
+            <p:ph type="sldNum" sz="quarter" idx="12"/>
+          </p:nvPr>
+        </p:nvSpPr>
+        <p:spPr/>
+        <p:txBody>
+          <a:bodyPr/>
+          <a:lstStyle/>
+          <a:p>
+            <a:fld id="{875CF0F1-4288-4E20-A5EE-551BC0760B6A}" type="slidenum">
+              <a:rPr lang="en-BE" b="1" smtClean="0"/>
+              <a:t>7</a:t>
+            </a:fld>
+            <a:endParaRPr lang="en-BE" b="1" dirty="0"/>
+          </a:p>
+        </p:txBody>
+      </p:sp>
+      <p:sp>
+        <p:nvSpPr>
+          <p:cNvPr id="15" name="Footer Placeholder 14">
+            <a:extLst>
+              <a:ext uri="{FF2B5EF4-FFF2-40B4-BE49-F238E27FC236}">
+                <a16:creationId xmlns:a16="http://schemas.microsoft.com/office/drawing/2014/main" id="{B1D8D201-32DF-58D4-5FD1-5361EE71A5A6}"/>
+              </a:ext>
+            </a:extLst>
+          </p:cNvPr>
+          <p:cNvSpPr>
+            <a:spLocks noGrp="1"/>
+          </p:cNvSpPr>
+          <p:nvPr>
+            <p:ph type="ftr" sz="quarter" idx="11"/>
+          </p:nvPr>
+        </p:nvSpPr>
+        <p:spPr/>
+        <p:txBody>
+          <a:bodyPr/>
+          <a:lstStyle/>
+          <a:p>
+            <a:r>
+              <a:rPr lang="en-GB" b="1" dirty="0"/>
+              <a:t>NXDG 2026 -Ghent, Belgium</a:t>
+            </a:r>
+            <a:endParaRPr lang="en-BE" b="1" dirty="0"/>
+          </a:p>
+        </p:txBody>
+      </p:sp>
       <p:pic>
         <p:nvPicPr>
-          <p:cNvPr id="8" name="Picture 7">
-            <a:extLst>
-              <a:ext uri="{FF2B5EF4-FFF2-40B4-BE49-F238E27FC236}">
-                <a16:creationId xmlns:a16="http://schemas.microsoft.com/office/drawing/2014/main" id="{95B7F335-2C26-2495-2751-EA7682C214B3}"/>
+          <p:cNvPr id="7" name="Picture 6">
+            <a:extLst>
+              <a:ext uri="{FF2B5EF4-FFF2-40B4-BE49-F238E27FC236}">
+                <a16:creationId xmlns:a16="http://schemas.microsoft.com/office/drawing/2014/main" id="{3C2A7B2F-6D95-840E-E173-972BCCFB7516}"/>
               </a:ext>
             </a:extLst>
           </p:cNvPr>
@@ -12337,146 +12620,50 @@
         </p:blipFill>
         <p:spPr>
           <a:xfrm>
-            <a:off x="6862947" y="4682566"/>
-            <a:ext cx="3710500" cy="896451"/>
+            <a:off x="7330509" y="4035203"/>
+            <a:ext cx="3657917" cy="1932481"/>
           </a:xfrm>
           <a:prstGeom prst="rect">
             <a:avLst/>
           </a:prstGeom>
         </p:spPr>
       </p:pic>
-      <p:sp>
-        <p:nvSpPr>
-          <p:cNvPr id="9" name="Arrow: Down 8">
-            <a:extLst>
-              <a:ext uri="{FF2B5EF4-FFF2-40B4-BE49-F238E27FC236}">
-                <a16:creationId xmlns:a16="http://schemas.microsoft.com/office/drawing/2014/main" id="{8048E060-77EF-2AE9-C417-21DCCCE05366}"/>
-              </a:ext>
-            </a:extLst>
-          </p:cNvPr>
-          <p:cNvSpPr/>
+      <p:pic>
+        <p:nvPicPr>
+          <p:cNvPr id="11" name="Picture 10">
+            <a:extLst>
+              <a:ext uri="{FF2B5EF4-FFF2-40B4-BE49-F238E27FC236}">
+                <a16:creationId xmlns:a16="http://schemas.microsoft.com/office/drawing/2014/main" id="{518DC9BC-ABE0-26DF-AA10-53676FC77EB6}"/>
+              </a:ext>
+            </a:extLst>
+          </p:cNvPr>
+          <p:cNvPicPr>
+            <a:picLocks noChangeAspect="1"/>
+          </p:cNvPicPr>
           <p:nvPr/>
-        </p:nvSpPr>
+        </p:nvPicPr>
+        <p:blipFill>
+          <a:blip r:embed="rId3">
+            <a:extLst>
+              <a:ext uri="{28A0092B-C50C-407E-A947-70E740481C1C}">
+                <a14:useLocalDpi xmlns:a14="http://schemas.microsoft.com/office/drawing/2010/main" val="0"/>
+              </a:ext>
+            </a:extLst>
+          </a:blip>
+          <a:stretch>
+            <a:fillRect/>
+          </a:stretch>
+        </p:blipFill>
         <p:spPr>
-          <a:xfrm rot="18737194">
-            <a:off x="6182755" y="4362834"/>
-            <a:ext cx="413519" cy="1001371"/>
+          <a:xfrm>
+            <a:off x="2376948" y="4035202"/>
+            <a:ext cx="4816257" cy="2068896"/>
           </a:xfrm>
-          <a:prstGeom prst="downArrow">
+          <a:prstGeom prst="rect">
             <a:avLst/>
           </a:prstGeom>
         </p:spPr>
-        <p:style>
-          <a:lnRef idx="2">
-            <a:schemeClr val="accent1">
-              <a:shade val="15000"/>
-            </a:schemeClr>
-          </a:lnRef>
-          <a:fillRef idx="1">
-            <a:schemeClr val="accent1"/>
-          </a:fillRef>
-          <a:effectRef idx="0">
-            <a:schemeClr val="accent1"/>
-          </a:effectRef>
-          <a:fontRef idx="minor">
-            <a:schemeClr val="lt1"/>
-          </a:fontRef>
-        </p:style>
-        <p:txBody>
-          <a:bodyPr rtlCol="0" anchor="ctr"/>
-          <a:lstStyle/>
-          <a:p>
-            <a:pPr algn="ctr"/>
-            <a:endParaRPr lang="en-BE" dirty="0"/>
-          </a:p>
-        </p:txBody>
-      </p:sp>
-      <p:sp>
-        <p:nvSpPr>
-          <p:cNvPr id="13" name="Date Placeholder 12">
-            <a:extLst>
-              <a:ext uri="{FF2B5EF4-FFF2-40B4-BE49-F238E27FC236}">
-                <a16:creationId xmlns:a16="http://schemas.microsoft.com/office/drawing/2014/main" id="{6C1944AC-D1B6-3FC1-944D-3F555572145A}"/>
-              </a:ext>
-            </a:extLst>
-          </p:cNvPr>
-          <p:cNvSpPr>
-            <a:spLocks noGrp="1"/>
-          </p:cNvSpPr>
-          <p:nvPr>
-            <p:ph type="dt" sz="half" idx="10"/>
-          </p:nvPr>
-        </p:nvSpPr>
-        <p:spPr/>
-        <p:txBody>
-          <a:bodyPr/>
-          <a:lstStyle/>
-          <a:p>
-            <a:r>
-              <a:rPr lang="en-BE" b="1" dirty="0"/>
-              <a:t>15/09/2026</a:t>
-            </a:r>
-          </a:p>
-        </p:txBody>
-      </p:sp>
-      <p:sp>
-        <p:nvSpPr>
-          <p:cNvPr id="14" name="Slide Number Placeholder 13">
-            <a:extLst>
-              <a:ext uri="{FF2B5EF4-FFF2-40B4-BE49-F238E27FC236}">
-                <a16:creationId xmlns:a16="http://schemas.microsoft.com/office/drawing/2014/main" id="{45544BE0-844E-141D-CC14-0C291C9F27B6}"/>
-              </a:ext>
-            </a:extLst>
-          </p:cNvPr>
-          <p:cNvSpPr>
-            <a:spLocks noGrp="1"/>
-          </p:cNvSpPr>
-          <p:nvPr>
-            <p:ph type="sldNum" sz="quarter" idx="12"/>
-          </p:nvPr>
-        </p:nvSpPr>
-        <p:spPr/>
-        <p:txBody>
-          <a:bodyPr/>
-          <a:lstStyle/>
-          <a:p>
-            <a:fld id="{875CF0F1-4288-4E20-A5EE-551BC0760B6A}" type="slidenum">
-              <a:rPr lang="en-BE" b="1" smtClean="0"/>
-              <a:t>7</a:t>
-            </a:fld>
-            <a:endParaRPr lang="en-BE" b="1" dirty="0"/>
-          </a:p>
-        </p:txBody>
-      </p:sp>
-      <p:sp>
-        <p:nvSpPr>
-          <p:cNvPr id="15" name="Footer Placeholder 14">
-            <a:extLst>
-              <a:ext uri="{FF2B5EF4-FFF2-40B4-BE49-F238E27FC236}">
-                <a16:creationId xmlns:a16="http://schemas.microsoft.com/office/drawing/2014/main" id="{B1D8D201-32DF-58D4-5FD1-5361EE71A5A6}"/>
-              </a:ext>
-            </a:extLst>
-          </p:cNvPr>
-          <p:cNvSpPr>
-            <a:spLocks noGrp="1"/>
-          </p:cNvSpPr>
-          <p:nvPr>
-            <p:ph type="ftr" sz="quarter" idx="11"/>
-          </p:nvPr>
-        </p:nvSpPr>
-        <p:spPr/>
-        <p:txBody>
-          <a:bodyPr/>
-          <a:lstStyle/>
-          <a:p>
-            <a:r>
-              <a:rPr lang="en-GB" b="1" dirty="0"/>
-              <a:t>NXDG 2026 -Ghent, Belgium</a:t>
-            </a:r>
-            <a:endParaRPr lang="en-BE" b="1" dirty="0"/>
-          </a:p>
-        </p:txBody>
-      </p:sp>
+      </p:pic>
     </p:spTree>
     <p:extLst>
       <p:ext uri="{BB962C8B-B14F-4D97-AF65-F5344CB8AC3E}">
@@ -12700,7 +12887,7 @@
                             </p:stCondLst>
                             <p:childTnLst>
                               <p:par>
-                                <p:cTn id="21" presetID="1" presetClass="entr" presetSubtype="0" fill="hold" grpId="0" nodeType="clickEffect">
+                                <p:cTn id="21" presetID="1" presetClass="entr" presetSubtype="0" fill="hold" nodeType="clickEffect">
                                   <p:stCondLst>
                                     <p:cond delay="0"/>
                                   </p:stCondLst>
@@ -12713,7 +12900,7 @@
                                           </p:stCondLst>
                                         </p:cTn>
                                         <p:tgtEl>
-                                          <p:spTgt spid="9"/>
+                                          <p:spTgt spid="11"/>
                                         </p:tgtEl>
                                         <p:attrNameLst>
                                           <p:attrName>style.visibility</p:attrName>
@@ -12726,21 +12913,39 @@
                                   </p:childTnLst>
                                 </p:cTn>
                               </p:par>
+                            </p:childTnLst>
+                          </p:cTn>
+                        </p:par>
+                      </p:childTnLst>
+                    </p:cTn>
+                  </p:par>
+                  <p:par>
+                    <p:cTn id="23" fill="hold">
+                      <p:stCondLst>
+                        <p:cond delay="indefinite"/>
+                      </p:stCondLst>
+                      <p:childTnLst>
+                        <p:par>
+                          <p:cTn id="24" fill="hold">
+                            <p:stCondLst>
+                              <p:cond delay="0"/>
+                            </p:stCondLst>
+                            <p:childTnLst>
                               <p:par>
-                                <p:cTn id="23" presetID="1" presetClass="entr" presetSubtype="0" fill="hold" nodeType="withEffect">
+                                <p:cTn id="25" presetID="1" presetClass="entr" presetSubtype="0" fill="hold" nodeType="clickEffect">
                                   <p:stCondLst>
                                     <p:cond delay="0"/>
                                   </p:stCondLst>
                                   <p:childTnLst>
                                     <p:set>
                                       <p:cBhvr>
-                                        <p:cTn id="24" dur="1" fill="hold">
+                                        <p:cTn id="26" dur="1" fill="hold">
                                           <p:stCondLst>
                                             <p:cond delay="0"/>
                                           </p:stCondLst>
                                         </p:cTn>
                                         <p:tgtEl>
-                                          <p:spTgt spid="8"/>
+                                          <p:spTgt spid="7"/>
                                         </p:tgtEl>
                                         <p:attrNameLst>
                                           <p:attrName>style.visibility</p:attrName>
@@ -12782,7 +12987,6 @@
     </p:tnLst>
     <p:bldLst>
       <p:bldP spid="5" grpId="0"/>
-      <p:bldP spid="9" grpId="0" animBg="1"/>
     </p:bldLst>
   </p:timing>
 </p:sld>
@@ -12974,18 +13178,11 @@
             </a:r>
             <a:r>
               <a:rPr lang="en-GB" sz="2000" dirty="0"/>
-              <a:t>} denotes the dataset metadata, where 𝑀</a:t>
-            </a:r>
-            <a:r>
-              <a:rPr lang="en-GB" sz="2000" baseline="-25000" dirty="0"/>
-              <a:t>𝑑</a:t>
-            </a:r>
-            <a:r>
-              <a:rPr lang="en-GB" sz="2000" dirty="0"/>
-              <a:t> is either the dataset title or description.</a:t>
-            </a:r>
-          </a:p>
-          <a:p>
+              <a:t>} denotes the dataset metadata.</a:t>
+            </a:r>
+          </a:p>
+          <a:p>
+            <a:pPr algn="just"/>
             <a:r>
               <a:rPr lang="en-GB" sz="2000" dirty="0"/>
               <a:t>The formal definition of average keyword relevance is as given: </a:t>
@@ -13562,7 +13759,7 @@
           <a:p>
             <a:r>
               <a:rPr lang="en-GB" sz="2000" dirty="0"/>
-              <a:t>Let 𝑑 ∈ 𝐷 denote a dataset and 𝑀</a:t>
+              <a:t>Let 𝑑 ∈ 𝐷 denote a dataset, 𝑀</a:t>
             </a:r>
             <a:r>
               <a:rPr lang="en-GB" sz="2000" baseline="-25000" dirty="0"/>
@@ -13586,21 +13783,15 @@
             </a:r>
             <a:r>
               <a:rPr lang="en-GB" sz="2000" dirty="0"/>
-              <a:t>} represent the associated descriptive metadata.</a:t>
-            </a:r>
-          </a:p>
-          <a:p>
+              <a:t>} represent the associated descriptive metadata and 𝐾</a:t>
+            </a:r>
+            <a:r>
+              <a:rPr lang="en-GB" sz="2000" baseline="-25000" dirty="0"/>
+              <a:t>𝑑 </a:t>
+            </a:r>
             <a:r>
               <a:rPr lang="en-GB" sz="2000" dirty="0"/>
-              <a:t>Let 𝐶</a:t>
-            </a:r>
-            <a:r>
-              <a:rPr lang="en-GB" sz="2000" baseline="-25000" dirty="0"/>
-              <a:t>𝑑</a:t>
-            </a:r>
-            <a:r>
-              <a:rPr lang="en-GB" sz="2000" dirty="0"/>
-              <a:t> = {𝑐</a:t>
+              <a:t>= {𝑘</a:t>
             </a:r>
             <a:r>
               <a:rPr lang="en-GB" sz="2000" baseline="-25000" dirty="0"/>
@@ -13608,38 +13799,6 @@
             </a:r>
             <a:r>
               <a:rPr lang="en-GB" sz="2000" dirty="0"/>
-              <a:t>, … , 𝑐</a:t>
-            </a:r>
-            <a:r>
-              <a:rPr lang="en-GB" sz="2000" baseline="-25000" dirty="0"/>
-              <a:t>𝑚</a:t>
-            </a:r>
-            <a:r>
-              <a:rPr lang="en-GB" sz="2000" dirty="0"/>
-              <a:t>} denote the set of concepts expressed in metadata field 𝑀</a:t>
-            </a:r>
-            <a:r>
-              <a:rPr lang="en-GB" sz="2000" baseline="-25000" dirty="0"/>
-              <a:t>𝑑</a:t>
-            </a:r>
-            <a:r>
-              <a:rPr lang="en-GB" sz="2000" dirty="0"/>
-              <a:t>, and 𝐾</a:t>
-            </a:r>
-            <a:r>
-              <a:rPr lang="en-GB" sz="2000" baseline="-25000" dirty="0"/>
-              <a:t>𝑑 </a:t>
-            </a:r>
-            <a:r>
-              <a:rPr lang="en-GB" sz="2000" dirty="0"/>
-              <a:t>= {𝑘</a:t>
-            </a:r>
-            <a:r>
-              <a:rPr lang="en-GB" sz="2000" baseline="-25000" dirty="0"/>
-              <a:t>1</a:t>
-            </a:r>
-            <a:r>
-              <a:rPr lang="en-GB" sz="2000" dirty="0"/>
               <a:t>, … , 𝑘</a:t>
             </a:r>
             <a:r>
@@ -13648,7 +13807,7 @@
             </a:r>
             <a:r>
               <a:rPr lang="en-GB" sz="2000" dirty="0"/>
-              <a:t>} denote the set of assigned keywords.</a:t>
+              <a:t>} the set of assigned keywords.</a:t>
             </a:r>
           </a:p>
           <a:p>
@@ -13764,7 +13923,7 @@
         </p:blipFill>
         <p:spPr>
           <a:xfrm>
-            <a:off x="2957053" y="4470051"/>
+            <a:off x="2501080" y="3929277"/>
             <a:ext cx="7386484" cy="1758125"/>
           </a:xfrm>
           <a:prstGeom prst="rect">
@@ -14093,55 +14252,6 @@
                                     <p:set>
                                       <p:cBhvr>
                                         <p:cTn id="22" dur="1" fill="hold">
-                                          <p:stCondLst>
-                                            <p:cond delay="0"/>
-                                          </p:stCondLst>
-                                        </p:cTn>
-                                        <p:tgtEl>
-                                          <p:spTgt spid="3">
-                                            <p:txEl>
-                                              <p:pRg st="4" end="4"/>
-                                            </p:txEl>
-                                          </p:spTgt>
-                                        </p:tgtEl>
-                                        <p:attrNameLst>
-                                          <p:attrName>style.visibility</p:attrName>
-                                        </p:attrNameLst>
-                                      </p:cBhvr>
-                                      <p:to>
-                                        <p:strVal val="visible"/>
-                                      </p:to>
-                                    </p:set>
-                                  </p:childTnLst>
-                                </p:cTn>
-                              </p:par>
-                            </p:childTnLst>
-                          </p:cTn>
-                        </p:par>
-                      </p:childTnLst>
-                    </p:cTn>
-                  </p:par>
-                  <p:par>
-                    <p:cTn id="23" fill="hold">
-                      <p:stCondLst>
-                        <p:cond delay="indefinite"/>
-                      </p:stCondLst>
-                      <p:childTnLst>
-                        <p:par>
-                          <p:cTn id="24" fill="hold">
-                            <p:stCondLst>
-                              <p:cond delay="0"/>
-                            </p:stCondLst>
-                            <p:childTnLst>
-                              <p:par>
-                                <p:cTn id="25" presetID="1" presetClass="entr" presetSubtype="0" fill="hold" nodeType="clickEffect">
-                                  <p:stCondLst>
-                                    <p:cond delay="0"/>
-                                  </p:stCondLst>
-                                  <p:childTnLst>
-                                    <p:set>
-                                      <p:cBhvr>
-                                        <p:cTn id="26" dur="1" fill="hold">
                                           <p:stCondLst>
                                             <p:cond delay="0"/>
                                           </p:stCondLst>
